--- a/IEP/t2-lesson2-vertical-horizontal-transformations-IEP-catchup.pptx
+++ b/IEP/t2-lesson2-vertical-horizontal-transformations-IEP-catchup.pptx
@@ -2688,6 +2688,40 @@
           </a:p>
         </p:txBody>
       </p:sp>
+      <p:sp>
+        <p:nvSpPr>
+          <p:cNvPr id="12" name="Slide Number 12"/>
+          <p:cNvSpPr txBox="1"/>
+          <p:nvPr/>
+        </p:nvSpPr>
+        <p:spPr>
+          <a:xfrm>
+            <a:off x="11277295" y="6611112"/>
+            <a:ext cx="685800" cy="201168"/>
+          </a:xfrm>
+          <a:prstGeom prst="rect">
+            <a:avLst/>
+          </a:prstGeom>
+          <a:noFill/>
+        </p:spPr>
+        <p:txBody>
+          <a:bodyPr wrap="none" lIns="0" tIns="0" rIns="0" bIns="0" anchor="b">
+            <a:noAutofit/>
+          </a:bodyPr>
+          <a:lstStyle/>
+          <a:p>
+            <a:pPr algn="r"/>
+            <a:fld id="{5C1A6E0B-3B1F-4D5E-9C7A-2F4B8D6E1A90}" type="slidenum">
+              <a:rPr lang="en-US" sz="1200" dirty="0">
+                <a:solidFill>
+                  <a:srgbClr val="5F6272"/>
+                </a:solidFill>
+              </a:rPr>
+              <a:t>1</a:t>
+            </a:fld>
+          </a:p>
+        </p:txBody>
+      </p:sp>
     </p:spTree>
   </p:cSld>
   <p:clrMapOvr>
@@ -3443,6 +3477,40 @@
               <a:t xml:space="preserve"> − 4</a:t>
             </a:r>
             <a:endParaRPr lang="en-US" sz="2325" dirty="0"/>
+          </a:p>
+        </p:txBody>
+      </p:sp>
+      <p:sp>
+        <p:nvSpPr>
+          <p:cNvPr id="12" name="Slide Number 12"/>
+          <p:cNvSpPr txBox="1"/>
+          <p:nvPr/>
+        </p:nvSpPr>
+        <p:spPr>
+          <a:xfrm>
+            <a:off x="11277295" y="6611112"/>
+            <a:ext cx="685800" cy="201168"/>
+          </a:xfrm>
+          <a:prstGeom prst="rect">
+            <a:avLst/>
+          </a:prstGeom>
+          <a:noFill/>
+        </p:spPr>
+        <p:txBody>
+          <a:bodyPr wrap="none" lIns="0" tIns="0" rIns="0" bIns="0" anchor="b">
+            <a:noAutofit/>
+          </a:bodyPr>
+          <a:lstStyle/>
+          <a:p>
+            <a:pPr algn="r"/>
+            <a:fld id="{5C1A6E0B-3B1F-4D5E-9C7A-2F4B8D6E1A90}" type="slidenum">
+              <a:rPr lang="en-US" sz="1200" dirty="0">
+                <a:solidFill>
+                  <a:srgbClr val="5F6272"/>
+                </a:solidFill>
+              </a:rPr>
+              <a:t>10</a:t>
+            </a:fld>
           </a:p>
         </p:txBody>
       </p:sp>
@@ -4333,6 +4401,40 @@
               <a:t xml:space="preserve">right 3</a:t>
             </a:r>
             <a:endParaRPr lang="en-US" sz="2325" dirty="0"/>
+          </a:p>
+        </p:txBody>
+      </p:sp>
+      <p:sp>
+        <p:nvSpPr>
+          <p:cNvPr id="13" name="Slide Number 13"/>
+          <p:cNvSpPr txBox="1"/>
+          <p:nvPr/>
+        </p:nvSpPr>
+        <p:spPr>
+          <a:xfrm>
+            <a:off x="11277295" y="6611112"/>
+            <a:ext cx="685800" cy="201168"/>
+          </a:xfrm>
+          <a:prstGeom prst="rect">
+            <a:avLst/>
+          </a:prstGeom>
+          <a:noFill/>
+        </p:spPr>
+        <p:txBody>
+          <a:bodyPr wrap="none" lIns="0" tIns="0" rIns="0" bIns="0" anchor="b">
+            <a:noAutofit/>
+          </a:bodyPr>
+          <a:lstStyle/>
+          <a:p>
+            <a:pPr algn="r"/>
+            <a:fld id="{5C1A6E0B-3B1F-4D5E-9C7A-2F4B8D6E1A90}" type="slidenum">
+              <a:rPr lang="en-US" sz="1200" dirty="0">
+                <a:solidFill>
+                  <a:srgbClr val="5F6272"/>
+                </a:solidFill>
+              </a:rPr>
+              <a:t>11</a:t>
+            </a:fld>
           </a:p>
         </p:txBody>
       </p:sp>
@@ -5275,6 +5377,40 @@
           </a:p>
         </p:txBody>
       </p:sp>
+      <p:sp>
+        <p:nvSpPr>
+          <p:cNvPr id="10" name="Slide Number 10"/>
+          <p:cNvSpPr txBox="1"/>
+          <p:nvPr/>
+        </p:nvSpPr>
+        <p:spPr>
+          <a:xfrm>
+            <a:off x="11277295" y="6611112"/>
+            <a:ext cx="685800" cy="201168"/>
+          </a:xfrm>
+          <a:prstGeom prst="rect">
+            <a:avLst/>
+          </a:prstGeom>
+          <a:noFill/>
+        </p:spPr>
+        <p:txBody>
+          <a:bodyPr wrap="none" lIns="0" tIns="0" rIns="0" bIns="0" anchor="b">
+            <a:noAutofit/>
+          </a:bodyPr>
+          <a:lstStyle/>
+          <a:p>
+            <a:pPr algn="r"/>
+            <a:fld id="{5C1A6E0B-3B1F-4D5E-9C7A-2F4B8D6E1A90}" type="slidenum">
+              <a:rPr lang="en-US" sz="1200" dirty="0">
+                <a:solidFill>
+                  <a:srgbClr val="5F6272"/>
+                </a:solidFill>
+              </a:rPr>
+              <a:t>12</a:t>
+            </a:fld>
+          </a:p>
+        </p:txBody>
+      </p:sp>
     </p:spTree>
   </p:cSld>
   <p:clrMapOvr>
@@ -6274,6 +6410,40 @@
           </a:p>
         </p:txBody>
       </p:sp>
+      <p:sp>
+        <p:nvSpPr>
+          <p:cNvPr id="12" name="Slide Number 12"/>
+          <p:cNvSpPr txBox="1"/>
+          <p:nvPr/>
+        </p:nvSpPr>
+        <p:spPr>
+          <a:xfrm>
+            <a:off x="11277295" y="6611112"/>
+            <a:ext cx="685800" cy="201168"/>
+          </a:xfrm>
+          <a:prstGeom prst="rect">
+            <a:avLst/>
+          </a:prstGeom>
+          <a:noFill/>
+        </p:spPr>
+        <p:txBody>
+          <a:bodyPr wrap="none" lIns="0" tIns="0" rIns="0" bIns="0" anchor="b">
+            <a:noAutofit/>
+          </a:bodyPr>
+          <a:lstStyle/>
+          <a:p>
+            <a:pPr algn="r"/>
+            <a:fld id="{5C1A6E0B-3B1F-4D5E-9C7A-2F4B8D6E1A90}" type="slidenum">
+              <a:rPr lang="en-US" sz="1200" dirty="0">
+                <a:solidFill>
+                  <a:srgbClr val="5F6272"/>
+                </a:solidFill>
+              </a:rPr>
+              <a:t>13</a:t>
+            </a:fld>
+          </a:p>
+        </p:txBody>
+      </p:sp>
     </p:spTree>
   </p:cSld>
   <p:clrMapOvr>
@@ -6761,6 +6931,40 @@
           </a:p>
         </p:txBody>
       </p:sp>
+      <p:sp>
+        <p:nvSpPr>
+          <p:cNvPr id="5" name="Slide Number 5"/>
+          <p:cNvSpPr txBox="1"/>
+          <p:nvPr/>
+        </p:nvSpPr>
+        <p:spPr>
+          <a:xfrm>
+            <a:off x="11277295" y="6611112"/>
+            <a:ext cx="685800" cy="201168"/>
+          </a:xfrm>
+          <a:prstGeom prst="rect">
+            <a:avLst/>
+          </a:prstGeom>
+          <a:noFill/>
+        </p:spPr>
+        <p:txBody>
+          <a:bodyPr wrap="none" lIns="0" tIns="0" rIns="0" bIns="0" anchor="b">
+            <a:noAutofit/>
+          </a:bodyPr>
+          <a:lstStyle/>
+          <a:p>
+            <a:pPr algn="r"/>
+            <a:fld id="{5C1A6E0B-3B1F-4D5E-9C7A-2F4B8D6E1A90}" type="slidenum">
+              <a:rPr lang="en-US" sz="1200" dirty="0">
+                <a:solidFill>
+                  <a:srgbClr val="5F6272"/>
+                </a:solidFill>
+              </a:rPr>
+              <a:t>14</a:t>
+            </a:fld>
+          </a:p>
+        </p:txBody>
+      </p:sp>
     </p:spTree>
   </p:cSld>
   <p:clrMapOvr>
@@ -6921,6 +7125,40 @@
           </a:p>
         </p:txBody>
       </p:sp>
+      <p:sp>
+        <p:nvSpPr>
+          <p:cNvPr id="5" name="Slide Number 5"/>
+          <p:cNvSpPr txBox="1"/>
+          <p:nvPr/>
+        </p:nvSpPr>
+        <p:spPr>
+          <a:xfrm>
+            <a:off x="11277295" y="6611112"/>
+            <a:ext cx="685800" cy="201168"/>
+          </a:xfrm>
+          <a:prstGeom prst="rect">
+            <a:avLst/>
+          </a:prstGeom>
+          <a:noFill/>
+        </p:spPr>
+        <p:txBody>
+          <a:bodyPr wrap="none" lIns="0" tIns="0" rIns="0" bIns="0" anchor="b">
+            <a:noAutofit/>
+          </a:bodyPr>
+          <a:lstStyle/>
+          <a:p>
+            <a:pPr algn="r"/>
+            <a:fld id="{5C1A6E0B-3B1F-4D5E-9C7A-2F4B8D6E1A90}" type="slidenum">
+              <a:rPr lang="en-US" sz="1200" dirty="0">
+                <a:solidFill>
+                  <a:srgbClr val="5F6272"/>
+                </a:solidFill>
+              </a:rPr>
+              <a:t>15</a:t>
+            </a:fld>
+          </a:p>
+        </p:txBody>
+      </p:sp>
     </p:spTree>
   </p:cSld>
   <p:clrMapOvr>
@@ -8152,6 +8390,40 @@
               <a:t xml:space="preserve">x</a:t>
             </a:r>
             <a:endParaRPr lang="en-US" sz="2325" dirty="0"/>
+          </a:p>
+        </p:txBody>
+      </p:sp>
+      <p:sp>
+        <p:nvSpPr>
+          <p:cNvPr id="12" name="Slide Number 12"/>
+          <p:cNvSpPr txBox="1"/>
+          <p:nvPr/>
+        </p:nvSpPr>
+        <p:spPr>
+          <a:xfrm>
+            <a:off x="11277295" y="6611112"/>
+            <a:ext cx="685800" cy="201168"/>
+          </a:xfrm>
+          <a:prstGeom prst="rect">
+            <a:avLst/>
+          </a:prstGeom>
+          <a:noFill/>
+        </p:spPr>
+        <p:txBody>
+          <a:bodyPr wrap="none" lIns="0" tIns="0" rIns="0" bIns="0" anchor="b">
+            <a:noAutofit/>
+          </a:bodyPr>
+          <a:lstStyle/>
+          <a:p>
+            <a:pPr algn="r"/>
+            <a:fld id="{5C1A6E0B-3B1F-4D5E-9C7A-2F4B8D6E1A90}" type="slidenum">
+              <a:rPr lang="en-US" sz="1200" dirty="0">
+                <a:solidFill>
+                  <a:srgbClr val="5F6272"/>
+                </a:solidFill>
+              </a:rPr>
+              <a:t>16</a:t>
+            </a:fld>
           </a:p>
         </p:txBody>
       </p:sp>
@@ -8817,6 +9089,40 @@
           </a:p>
         </p:txBody>
       </p:sp>
+      <p:sp>
+        <p:nvSpPr>
+          <p:cNvPr id="6" name="Slide Number 6"/>
+          <p:cNvSpPr txBox="1"/>
+          <p:nvPr/>
+        </p:nvSpPr>
+        <p:spPr>
+          <a:xfrm>
+            <a:off x="11277295" y="6611112"/>
+            <a:ext cx="685800" cy="201168"/>
+          </a:xfrm>
+          <a:prstGeom prst="rect">
+            <a:avLst/>
+          </a:prstGeom>
+          <a:noFill/>
+        </p:spPr>
+        <p:txBody>
+          <a:bodyPr wrap="none" lIns="0" tIns="0" rIns="0" bIns="0" anchor="b">
+            <a:noAutofit/>
+          </a:bodyPr>
+          <a:lstStyle/>
+          <a:p>
+            <a:pPr algn="r"/>
+            <a:fld id="{5C1A6E0B-3B1F-4D5E-9C7A-2F4B8D6E1A90}" type="slidenum">
+              <a:rPr lang="en-US" sz="1200" dirty="0">
+                <a:solidFill>
+                  <a:srgbClr val="5F6272"/>
+                </a:solidFill>
+              </a:rPr>
+              <a:t>17</a:t>
+            </a:fld>
+          </a:p>
+        </p:txBody>
+      </p:sp>
     </p:spTree>
   </p:cSld>
   <p:clrMapOvr>
@@ -10287,6 +10593,40 @@
           </a:p>
         </p:txBody>
       </p:sp>
+      <p:sp>
+        <p:nvSpPr>
+          <p:cNvPr id="26" name="Slide Number 26"/>
+          <p:cNvSpPr txBox="1"/>
+          <p:nvPr/>
+        </p:nvSpPr>
+        <p:spPr>
+          <a:xfrm>
+            <a:off x="11277295" y="6611112"/>
+            <a:ext cx="685800" cy="201168"/>
+          </a:xfrm>
+          <a:prstGeom prst="rect">
+            <a:avLst/>
+          </a:prstGeom>
+          <a:noFill/>
+        </p:spPr>
+        <p:txBody>
+          <a:bodyPr wrap="none" lIns="0" tIns="0" rIns="0" bIns="0" anchor="b">
+            <a:noAutofit/>
+          </a:bodyPr>
+          <a:lstStyle/>
+          <a:p>
+            <a:pPr algn="r"/>
+            <a:fld id="{5C1A6E0B-3B1F-4D5E-9C7A-2F4B8D6E1A90}" type="slidenum">
+              <a:rPr lang="en-US" sz="1200" dirty="0">
+                <a:solidFill>
+                  <a:srgbClr val="5F6272"/>
+                </a:solidFill>
+              </a:rPr>
+              <a:t>18</a:t>
+            </a:fld>
+          </a:p>
+        </p:txBody>
+      </p:sp>
     </p:spTree>
   </p:cSld>
   <p:clrMapOvr>
@@ -10939,6 +11279,40 @@
           </a:p>
         </p:txBody>
       </p:sp>
+      <p:sp>
+        <p:nvSpPr>
+          <p:cNvPr id="8" name="Slide Number 8"/>
+          <p:cNvSpPr txBox="1"/>
+          <p:nvPr/>
+        </p:nvSpPr>
+        <p:spPr>
+          <a:xfrm>
+            <a:off x="11277295" y="6611112"/>
+            <a:ext cx="685800" cy="201168"/>
+          </a:xfrm>
+          <a:prstGeom prst="rect">
+            <a:avLst/>
+          </a:prstGeom>
+          <a:noFill/>
+        </p:spPr>
+        <p:txBody>
+          <a:bodyPr wrap="none" lIns="0" tIns="0" rIns="0" bIns="0" anchor="b">
+            <a:noAutofit/>
+          </a:bodyPr>
+          <a:lstStyle/>
+          <a:p>
+            <a:pPr algn="r"/>
+            <a:fld id="{5C1A6E0B-3B1F-4D5E-9C7A-2F4B8D6E1A90}" type="slidenum">
+              <a:rPr lang="en-US" sz="1200" dirty="0">
+                <a:solidFill>
+                  <a:srgbClr val="5F6272"/>
+                </a:solidFill>
+              </a:rPr>
+              <a:t>19</a:t>
+            </a:fld>
+          </a:p>
+        </p:txBody>
+      </p:sp>
     </p:spTree>
   </p:cSld>
   <p:clrMapOvr>
@@ -11099,6 +11473,40 @@
           </a:p>
         </p:txBody>
       </p:sp>
+      <p:sp>
+        <p:nvSpPr>
+          <p:cNvPr id="5" name="Slide Number 5"/>
+          <p:cNvSpPr txBox="1"/>
+          <p:nvPr/>
+        </p:nvSpPr>
+        <p:spPr>
+          <a:xfrm>
+            <a:off x="11277295" y="6611112"/>
+            <a:ext cx="685800" cy="201168"/>
+          </a:xfrm>
+          <a:prstGeom prst="rect">
+            <a:avLst/>
+          </a:prstGeom>
+          <a:noFill/>
+        </p:spPr>
+        <p:txBody>
+          <a:bodyPr wrap="none" lIns="0" tIns="0" rIns="0" bIns="0" anchor="b">
+            <a:noAutofit/>
+          </a:bodyPr>
+          <a:lstStyle/>
+          <a:p>
+            <a:pPr algn="r"/>
+            <a:fld id="{5C1A6E0B-3B1F-4D5E-9C7A-2F4B8D6E1A90}" type="slidenum">
+              <a:rPr lang="en-US" sz="1200" dirty="0">
+                <a:solidFill>
+                  <a:srgbClr val="5F6272"/>
+                </a:solidFill>
+              </a:rPr>
+              <a:t>2</a:t>
+            </a:fld>
+          </a:p>
+        </p:txBody>
+      </p:sp>
     </p:spTree>
   </p:cSld>
   <p:clrMapOvr>
@@ -12100,6 +12508,40 @@
               <a:t xml:space="preserve"> + 5</a:t>
             </a:r>
             <a:endParaRPr lang="en-US" sz="2325" dirty="0"/>
+          </a:p>
+        </p:txBody>
+      </p:sp>
+      <p:sp>
+        <p:nvSpPr>
+          <p:cNvPr id="19" name="Slide Number 19"/>
+          <p:cNvSpPr txBox="1"/>
+          <p:nvPr/>
+        </p:nvSpPr>
+        <p:spPr>
+          <a:xfrm>
+            <a:off x="11277295" y="6611112"/>
+            <a:ext cx="685800" cy="201168"/>
+          </a:xfrm>
+          <a:prstGeom prst="rect">
+            <a:avLst/>
+          </a:prstGeom>
+          <a:noFill/>
+        </p:spPr>
+        <p:txBody>
+          <a:bodyPr wrap="none" lIns="0" tIns="0" rIns="0" bIns="0" anchor="b">
+            <a:noAutofit/>
+          </a:bodyPr>
+          <a:lstStyle/>
+          <a:p>
+            <a:pPr algn="r"/>
+            <a:fld id="{5C1A6E0B-3B1F-4D5E-9C7A-2F4B8D6E1A90}" type="slidenum">
+              <a:rPr lang="en-US" sz="1200" dirty="0">
+                <a:solidFill>
+                  <a:srgbClr val="5F6272"/>
+                </a:solidFill>
+              </a:rPr>
+              <a:t>20</a:t>
+            </a:fld>
           </a:p>
         </p:txBody>
       </p:sp>
@@ -13151,6 +13593,40 @@
           </a:p>
         </p:txBody>
       </p:sp>
+      <p:sp>
+        <p:nvSpPr>
+          <p:cNvPr id="18" name="Slide Number 18"/>
+          <p:cNvSpPr txBox="1"/>
+          <p:nvPr/>
+        </p:nvSpPr>
+        <p:spPr>
+          <a:xfrm>
+            <a:off x="11277295" y="6611112"/>
+            <a:ext cx="685800" cy="201168"/>
+          </a:xfrm>
+          <a:prstGeom prst="rect">
+            <a:avLst/>
+          </a:prstGeom>
+          <a:noFill/>
+        </p:spPr>
+        <p:txBody>
+          <a:bodyPr wrap="none" lIns="0" tIns="0" rIns="0" bIns="0" anchor="b">
+            <a:noAutofit/>
+          </a:bodyPr>
+          <a:lstStyle/>
+          <a:p>
+            <a:pPr algn="r"/>
+            <a:fld id="{5C1A6E0B-3B1F-4D5E-9C7A-2F4B8D6E1A90}" type="slidenum">
+              <a:rPr lang="en-US" sz="1200" dirty="0">
+                <a:solidFill>
+                  <a:srgbClr val="5F6272"/>
+                </a:solidFill>
+              </a:rPr>
+              <a:t>21</a:t>
+            </a:fld>
+          </a:p>
+        </p:txBody>
+      </p:sp>
     </p:spTree>
   </p:cSld>
   <p:clrMapOvr>
@@ -13539,6 +14015,40 @@
           </a:p>
         </p:txBody>
       </p:sp>
+      <p:sp>
+        <p:nvSpPr>
+          <p:cNvPr id="5" name="Slide Number 5"/>
+          <p:cNvSpPr txBox="1"/>
+          <p:nvPr/>
+        </p:nvSpPr>
+        <p:spPr>
+          <a:xfrm>
+            <a:off x="11277295" y="6611112"/>
+            <a:ext cx="685800" cy="201168"/>
+          </a:xfrm>
+          <a:prstGeom prst="rect">
+            <a:avLst/>
+          </a:prstGeom>
+          <a:noFill/>
+        </p:spPr>
+        <p:txBody>
+          <a:bodyPr wrap="none" lIns="0" tIns="0" rIns="0" bIns="0" anchor="b">
+            <a:noAutofit/>
+          </a:bodyPr>
+          <a:lstStyle/>
+          <a:p>
+            <a:pPr algn="r"/>
+            <a:fld id="{5C1A6E0B-3B1F-4D5E-9C7A-2F4B8D6E1A90}" type="slidenum">
+              <a:rPr lang="en-US" sz="1200" dirty="0">
+                <a:solidFill>
+                  <a:srgbClr val="5F6272"/>
+                </a:solidFill>
+              </a:rPr>
+              <a:t>22</a:t>
+            </a:fld>
+          </a:p>
+        </p:txBody>
+      </p:sp>
     </p:spTree>
   </p:cSld>
   <p:clrMapOvr>
@@ -15674,6 +16184,40 @@
               <a:t xml:space="preserve">y = 2x</a:t>
             </a:r>
             <a:endParaRPr lang="en-US" sz="1275" dirty="0"/>
+          </a:p>
+        </p:txBody>
+      </p:sp>
+      <p:sp>
+        <p:nvSpPr>
+          <p:cNvPr id="55" name="Slide Number 55"/>
+          <p:cNvSpPr txBox="1"/>
+          <p:nvPr/>
+        </p:nvSpPr>
+        <p:spPr>
+          <a:xfrm>
+            <a:off x="11277295" y="6611112"/>
+            <a:ext cx="685800" cy="201168"/>
+          </a:xfrm>
+          <a:prstGeom prst="rect">
+            <a:avLst/>
+          </a:prstGeom>
+          <a:noFill/>
+        </p:spPr>
+        <p:txBody>
+          <a:bodyPr wrap="none" lIns="0" tIns="0" rIns="0" bIns="0" anchor="b">
+            <a:noAutofit/>
+          </a:bodyPr>
+          <a:lstStyle/>
+          <a:p>
+            <a:pPr algn="r"/>
+            <a:fld id="{5C1A6E0B-3B1F-4D5E-9C7A-2F4B8D6E1A90}" type="slidenum">
+              <a:rPr lang="en-US" sz="1200" dirty="0">
+                <a:solidFill>
+                  <a:srgbClr val="5F6272"/>
+                </a:solidFill>
+              </a:rPr>
+              <a:t>23</a:t>
+            </a:fld>
           </a:p>
         </p:txBody>
       </p:sp>
@@ -16713,6 +17257,40 @@
               <a:t xml:space="preserve"> + 3</a:t>
             </a:r>
             <a:endParaRPr lang="en-US" sz="2325" dirty="0"/>
+          </a:p>
+        </p:txBody>
+      </p:sp>
+      <p:sp>
+        <p:nvSpPr>
+          <p:cNvPr id="13" name="Slide Number 13"/>
+          <p:cNvSpPr txBox="1"/>
+          <p:nvPr/>
+        </p:nvSpPr>
+        <p:spPr>
+          <a:xfrm>
+            <a:off x="11277295" y="6611112"/>
+            <a:ext cx="685800" cy="201168"/>
+          </a:xfrm>
+          <a:prstGeom prst="rect">
+            <a:avLst/>
+          </a:prstGeom>
+          <a:noFill/>
+        </p:spPr>
+        <p:txBody>
+          <a:bodyPr wrap="none" lIns="0" tIns="0" rIns="0" bIns="0" anchor="b">
+            <a:noAutofit/>
+          </a:bodyPr>
+          <a:lstStyle/>
+          <a:p>
+            <a:pPr algn="r"/>
+            <a:fld id="{5C1A6E0B-3B1F-4D5E-9C7A-2F4B8D6E1A90}" type="slidenum">
+              <a:rPr lang="en-US" sz="1200" dirty="0">
+                <a:solidFill>
+                  <a:srgbClr val="5F6272"/>
+                </a:solidFill>
+              </a:rPr>
+              <a:t>24</a:t>
+            </a:fld>
           </a:p>
         </p:txBody>
       </p:sp>
@@ -17203,6 +17781,40 @@
           </a:p>
         </p:txBody>
       </p:sp>
+      <p:sp>
+        <p:nvSpPr>
+          <p:cNvPr id="5" name="Slide Number 5"/>
+          <p:cNvSpPr txBox="1"/>
+          <p:nvPr/>
+        </p:nvSpPr>
+        <p:spPr>
+          <a:xfrm>
+            <a:off x="11277295" y="6611112"/>
+            <a:ext cx="685800" cy="201168"/>
+          </a:xfrm>
+          <a:prstGeom prst="rect">
+            <a:avLst/>
+          </a:prstGeom>
+          <a:noFill/>
+        </p:spPr>
+        <p:txBody>
+          <a:bodyPr wrap="none" lIns="0" tIns="0" rIns="0" bIns="0" anchor="b">
+            <a:noAutofit/>
+          </a:bodyPr>
+          <a:lstStyle/>
+          <a:p>
+            <a:pPr algn="r"/>
+            <a:fld id="{5C1A6E0B-3B1F-4D5E-9C7A-2F4B8D6E1A90}" type="slidenum">
+              <a:rPr lang="en-US" sz="1200" dirty="0">
+                <a:solidFill>
+                  <a:srgbClr val="5F6272"/>
+                </a:solidFill>
+              </a:rPr>
+              <a:t>25</a:t>
+            </a:fld>
+          </a:p>
+        </p:txBody>
+      </p:sp>
     </p:spTree>
   </p:cSld>
   <p:clrMapOvr>
@@ -17481,6 +18093,40 @@
           </a:p>
         </p:txBody>
       </p:sp>
+      <p:sp>
+        <p:nvSpPr>
+          <p:cNvPr id="6" name="Slide Number 6"/>
+          <p:cNvSpPr txBox="1"/>
+          <p:nvPr/>
+        </p:nvSpPr>
+        <p:spPr>
+          <a:xfrm>
+            <a:off x="11277295" y="6611112"/>
+            <a:ext cx="685800" cy="201168"/>
+          </a:xfrm>
+          <a:prstGeom prst="rect">
+            <a:avLst/>
+          </a:prstGeom>
+          <a:noFill/>
+        </p:spPr>
+        <p:txBody>
+          <a:bodyPr wrap="none" lIns="0" tIns="0" rIns="0" bIns="0" anchor="b">
+            <a:noAutofit/>
+          </a:bodyPr>
+          <a:lstStyle/>
+          <a:p>
+            <a:pPr algn="r"/>
+            <a:fld id="{5C1A6E0B-3B1F-4D5E-9C7A-2F4B8D6E1A90}" type="slidenum">
+              <a:rPr lang="en-US" sz="1200" dirty="0">
+                <a:solidFill>
+                  <a:srgbClr val="5F6272"/>
+                </a:solidFill>
+              </a:rPr>
+              <a:t>26</a:t>
+            </a:fld>
+          </a:p>
+        </p:txBody>
+      </p:sp>
     </p:spTree>
   </p:cSld>
   <p:clrMapOvr>
@@ -18412,6 +19058,40 @@
               <a:t xml:space="preserve">Decreasing</a:t>
             </a:r>
             <a:endParaRPr lang="en-US" sz="2325" dirty="0"/>
+          </a:p>
+        </p:txBody>
+      </p:sp>
+      <p:sp>
+        <p:nvSpPr>
+          <p:cNvPr id="12" name="Slide Number 12"/>
+          <p:cNvSpPr txBox="1"/>
+          <p:nvPr/>
+        </p:nvSpPr>
+        <p:spPr>
+          <a:xfrm>
+            <a:off x="11277295" y="6611112"/>
+            <a:ext cx="685800" cy="201168"/>
+          </a:xfrm>
+          <a:prstGeom prst="rect">
+            <a:avLst/>
+          </a:prstGeom>
+          <a:noFill/>
+        </p:spPr>
+        <p:txBody>
+          <a:bodyPr wrap="none" lIns="0" tIns="0" rIns="0" bIns="0" anchor="b">
+            <a:noAutofit/>
+          </a:bodyPr>
+          <a:lstStyle/>
+          <a:p>
+            <a:pPr algn="r"/>
+            <a:fld id="{5C1A6E0B-3B1F-4D5E-9C7A-2F4B8D6E1A90}" type="slidenum">
+              <a:rPr lang="en-US" sz="1200" dirty="0">
+                <a:solidFill>
+                  <a:srgbClr val="5F6272"/>
+                </a:solidFill>
+              </a:rPr>
+              <a:t>3</a:t>
+            </a:fld>
           </a:p>
         </p:txBody>
       </p:sp>
@@ -19077,6 +19757,40 @@
           </a:p>
         </p:txBody>
       </p:sp>
+      <p:sp>
+        <p:nvSpPr>
+          <p:cNvPr id="6" name="Slide Number 6"/>
+          <p:cNvSpPr txBox="1"/>
+          <p:nvPr/>
+        </p:nvSpPr>
+        <p:spPr>
+          <a:xfrm>
+            <a:off x="11277295" y="6611112"/>
+            <a:ext cx="685800" cy="201168"/>
+          </a:xfrm>
+          <a:prstGeom prst="rect">
+            <a:avLst/>
+          </a:prstGeom>
+          <a:noFill/>
+        </p:spPr>
+        <p:txBody>
+          <a:bodyPr wrap="none" lIns="0" tIns="0" rIns="0" bIns="0" anchor="b">
+            <a:noAutofit/>
+          </a:bodyPr>
+          <a:lstStyle/>
+          <a:p>
+            <a:pPr algn="r"/>
+            <a:fld id="{5C1A6E0B-3B1F-4D5E-9C7A-2F4B8D6E1A90}" type="slidenum">
+              <a:rPr lang="en-US" sz="1200" dirty="0">
+                <a:solidFill>
+                  <a:srgbClr val="5F6272"/>
+                </a:solidFill>
+              </a:rPr>
+              <a:t>4</a:t>
+            </a:fld>
+          </a:p>
+        </p:txBody>
+      </p:sp>
     </p:spTree>
   </p:cSld>
   <p:clrMapOvr>
@@ -19737,6 +20451,40 @@
           </a:p>
         </p:txBody>
       </p:sp>
+      <p:sp>
+        <p:nvSpPr>
+          <p:cNvPr id="13" name="Slide Number 13"/>
+          <p:cNvSpPr txBox="1"/>
+          <p:nvPr/>
+        </p:nvSpPr>
+        <p:spPr>
+          <a:xfrm>
+            <a:off x="11277295" y="6611112"/>
+            <a:ext cx="685800" cy="201168"/>
+          </a:xfrm>
+          <a:prstGeom prst="rect">
+            <a:avLst/>
+          </a:prstGeom>
+          <a:noFill/>
+        </p:spPr>
+        <p:txBody>
+          <a:bodyPr wrap="none" lIns="0" tIns="0" rIns="0" bIns="0" anchor="b">
+            <a:noAutofit/>
+          </a:bodyPr>
+          <a:lstStyle/>
+          <a:p>
+            <a:pPr algn="r"/>
+            <a:fld id="{5C1A6E0B-3B1F-4D5E-9C7A-2F4B8D6E1A90}" type="slidenum">
+              <a:rPr lang="en-US" sz="1200" dirty="0">
+                <a:solidFill>
+                  <a:srgbClr val="5F6272"/>
+                </a:solidFill>
+              </a:rPr>
+              <a:t>5</a:t>
+            </a:fld>
+          </a:p>
+        </p:txBody>
+      </p:sp>
     </p:spTree>
   </p:cSld>
   <p:clrMapOvr>
@@ -20446,6 +21194,40 @@
               <a:t xml:space="preserve">point (−3, 1), slope 2</a:t>
             </a:r>
             <a:endParaRPr lang="en-US" sz="2325" dirty="0"/>
+          </a:p>
+        </p:txBody>
+      </p:sp>
+      <p:sp>
+        <p:nvSpPr>
+          <p:cNvPr id="13" name="Slide Number 13"/>
+          <p:cNvSpPr txBox="1"/>
+          <p:nvPr/>
+        </p:nvSpPr>
+        <p:spPr>
+          <a:xfrm>
+            <a:off x="11277295" y="6611112"/>
+            <a:ext cx="685800" cy="201168"/>
+          </a:xfrm>
+          <a:prstGeom prst="rect">
+            <a:avLst/>
+          </a:prstGeom>
+          <a:noFill/>
+        </p:spPr>
+        <p:txBody>
+          <a:bodyPr wrap="none" lIns="0" tIns="0" rIns="0" bIns="0" anchor="b">
+            <a:noAutofit/>
+          </a:bodyPr>
+          <a:lstStyle/>
+          <a:p>
+            <a:pPr algn="r"/>
+            <a:fld id="{5C1A6E0B-3B1F-4D5E-9C7A-2F4B8D6E1A90}" type="slidenum">
+              <a:rPr lang="en-US" sz="1200" dirty="0">
+                <a:solidFill>
+                  <a:srgbClr val="5F6272"/>
+                </a:solidFill>
+              </a:rPr>
+              <a:t>6</a:t>
+            </a:fld>
           </a:p>
         </p:txBody>
       </p:sp>
@@ -20936,6 +21718,40 @@
           </a:p>
         </p:txBody>
       </p:sp>
+      <p:sp>
+        <p:nvSpPr>
+          <p:cNvPr id="5" name="Slide Number 5"/>
+          <p:cNvSpPr txBox="1"/>
+          <p:nvPr/>
+        </p:nvSpPr>
+        <p:spPr>
+          <a:xfrm>
+            <a:off x="11277295" y="6611112"/>
+            <a:ext cx="685800" cy="201168"/>
+          </a:xfrm>
+          <a:prstGeom prst="rect">
+            <a:avLst/>
+          </a:prstGeom>
+          <a:noFill/>
+        </p:spPr>
+        <p:txBody>
+          <a:bodyPr wrap="none" lIns="0" tIns="0" rIns="0" bIns="0" anchor="b">
+            <a:noAutofit/>
+          </a:bodyPr>
+          <a:lstStyle/>
+          <a:p>
+            <a:pPr algn="r"/>
+            <a:fld id="{5C1A6E0B-3B1F-4D5E-9C7A-2F4B8D6E1A90}" type="slidenum">
+              <a:rPr lang="en-US" sz="1200" dirty="0">
+                <a:solidFill>
+                  <a:srgbClr val="5F6272"/>
+                </a:solidFill>
+              </a:rPr>
+              <a:t>7</a:t>
+            </a:fld>
+          </a:p>
+        </p:txBody>
+      </p:sp>
     </p:spTree>
   </p:cSld>
   <p:clrMapOvr>
@@ -21728,6 +22544,40 @@
           </a:p>
         </p:txBody>
       </p:sp>
+      <p:sp>
+        <p:nvSpPr>
+          <p:cNvPr id="16" name="Slide Number 16"/>
+          <p:cNvSpPr txBox="1"/>
+          <p:nvPr/>
+        </p:nvSpPr>
+        <p:spPr>
+          <a:xfrm>
+            <a:off x="11277295" y="6611112"/>
+            <a:ext cx="685800" cy="201168"/>
+          </a:xfrm>
+          <a:prstGeom prst="rect">
+            <a:avLst/>
+          </a:prstGeom>
+          <a:noFill/>
+        </p:spPr>
+        <p:txBody>
+          <a:bodyPr wrap="none" lIns="0" tIns="0" rIns="0" bIns="0" anchor="b">
+            <a:noAutofit/>
+          </a:bodyPr>
+          <a:lstStyle/>
+          <a:p>
+            <a:pPr algn="r"/>
+            <a:fld id="{5C1A6E0B-3B1F-4D5E-9C7A-2F4B8D6E1A90}" type="slidenum">
+              <a:rPr lang="en-US" sz="1200" dirty="0">
+                <a:solidFill>
+                  <a:srgbClr val="5F6272"/>
+                </a:solidFill>
+              </a:rPr>
+              <a:t>8</a:t>
+            </a:fld>
+          </a:p>
+        </p:txBody>
+      </p:sp>
     </p:spTree>
   </p:cSld>
   <p:clrMapOvr>
@@ -22117,6 +22967,40 @@
               <a:t xml:space="preserve"> To simplify, put the inside into the rule and distribute.</a:t>
             </a:r>
             <a:endParaRPr lang="en-US" sz="1950" dirty="0"/>
+          </a:p>
+        </p:txBody>
+      </p:sp>
+      <p:sp>
+        <p:nvSpPr>
+          <p:cNvPr id="8" name="Slide Number 8"/>
+          <p:cNvSpPr txBox="1"/>
+          <p:nvPr/>
+        </p:nvSpPr>
+        <p:spPr>
+          <a:xfrm>
+            <a:off x="11277295" y="6611112"/>
+            <a:ext cx="685800" cy="201168"/>
+          </a:xfrm>
+          <a:prstGeom prst="rect">
+            <a:avLst/>
+          </a:prstGeom>
+          <a:noFill/>
+        </p:spPr>
+        <p:txBody>
+          <a:bodyPr wrap="none" lIns="0" tIns="0" rIns="0" bIns="0" anchor="b">
+            <a:noAutofit/>
+          </a:bodyPr>
+          <a:lstStyle/>
+          <a:p>
+            <a:pPr algn="r"/>
+            <a:fld id="{5C1A6E0B-3B1F-4D5E-9C7A-2F4B8D6E1A90}" type="slidenum">
+              <a:rPr lang="en-US" sz="1200" dirty="0">
+                <a:solidFill>
+                  <a:srgbClr val="5F6272"/>
+                </a:solidFill>
+              </a:rPr>
+              <a:t>9</a:t>
+            </a:fld>
           </a:p>
         </p:txBody>
       </p:sp>

--- a/IEP/t2-lesson2-vertical-horizontal-transformations-IEP-catchup.pptx
+++ b/IEP/t2-lesson2-vertical-horizontal-transformations-IEP-catchup.pptx
@@ -1232,7 +1232,7 @@
           <a:p>
             <a:r>
               <a:rPr lang="en-US" dirty="0"/>
-              <a:t>Give students time to try all items before revealing. Students may use the steps slide and their notes.</a:t>
+              <a:t>Give students time to try all items before revealing. Students may use the steps slide and their notes. After each answer, click once per step and read it aloud so students can find where their work went wrong.</a:t>
             </a:r>
           </a:p>
         </p:txBody>
@@ -26573,14 +26573,14 @@
       </p:sp>
       <p:sp>
         <p:nvSpPr>
-          <p:cNvPr id="6" name="Shape 6"/>
+          <p:cNvPr id="8" name="Shape 8"/>
           <p:cNvSpPr txBox="1"/>
           <p:nvPr/>
         </p:nvSpPr>
         <p:spPr>
           <a:xfrm>
             <a:off x="685800" y="1618488"/>
-            <a:ext cx="10820095" cy="1309116"/>
+            <a:ext cx="3479698" cy="3106674"/>
           </a:xfrm>
           <a:prstGeom prst="roundRect">
             <a:avLst>
@@ -26620,7 +26620,7 @@
         <p:spPr>
           <a:xfrm>
             <a:off x="895350" y="1789938"/>
-            <a:ext cx="10400995" cy="352044"/>
+            <a:ext cx="3060598" cy="649224"/>
           </a:xfrm>
           <a:prstGeom prst="rect">
             <a:avLst/>
@@ -26743,8 +26743,8 @@
         </p:nvSpPr>
         <p:spPr>
           <a:xfrm>
-            <a:off x="895350" y="2237232"/>
-            <a:ext cx="3073847" cy="518922"/>
+            <a:off x="895350" y="2534412"/>
+            <a:ext cx="3060598" cy="518922"/>
           </a:xfrm>
           <a:prstGeom prst="roundRect">
             <a:avLst>
@@ -26795,14 +26795,122 @@
       </p:sp>
       <p:sp>
         <p:nvSpPr>
-          <p:cNvPr id="9" name="Shape 9"/>
-          <p:cNvSpPr txBox="1"/>
-          <p:nvPr/>
-        </p:nvSpPr>
-        <p:spPr>
-          <a:xfrm>
-            <a:off x="685800" y="3060954"/>
-            <a:ext cx="10820095" cy="1309116"/>
+          <p:cNvPr id="6" name="Shape 6"/>
+          <p:cNvSpPr txBox="1"/>
+          <p:nvPr/>
+        </p:nvSpPr>
+        <p:spPr>
+          <a:xfrm>
+            <a:off x="895350" y="3148584"/>
+            <a:ext cx="3060598" cy="774954"/>
+          </a:xfrm>
+          <a:prstGeom prst="rect">
+            <a:avLst/>
+          </a:prstGeom>
+          <a:noFill/>
+          <a:ln>
+            <a:noFill/>
+          </a:ln>
+        </p:spPr>
+        <p:txBody>
+          <a:bodyPr wrap="square" lIns="36576" tIns="27432" rIns="36576" bIns="27432" anchor="t">
+            <a:noAutofit/>
+          </a:bodyPr>
+          <a:lstStyle/>
+          <a:p>
+            <a:pPr algn="l">
+              <a:lnSpc>
+                <a:spcPct val="100000"/>
+              </a:lnSpc>
+            </a:pPr>
+            <a:r>
+              <a:rPr lang="en-US" sz="1575" dirty="0" b="1">
+                <a:solidFill>
+                  <a:srgbClr val="16171D"/>
+                </a:solidFill>
+                <a:latin typeface="Segoe UI"/>
+                <a:cs typeface="Segoe UI"/>
+              </a:rPr>
+              <a:t xml:space="preserve">1.</a:t>
+            </a:r>
+            <a:r>
+              <a:rPr lang="en-US" sz="1575" dirty="0">
+                <a:solidFill>
+                  <a:srgbClr val="16171D"/>
+                </a:solidFill>
+                <a:latin typeface="Segoe UI"/>
+                <a:cs typeface="Segoe UI"/>
+              </a:rPr>
+              <a:t xml:space="preserve"> The 6 is inside the parentheses, so the graph moves left or right.</a:t>
+            </a:r>
+            <a:endParaRPr lang="en-US" sz="1575" dirty="0"/>
+          </a:p>
+        </p:txBody>
+      </p:sp>
+      <p:sp>
+        <p:nvSpPr>
+          <p:cNvPr id="7" name="Shape 7"/>
+          <p:cNvSpPr txBox="1"/>
+          <p:nvPr/>
+        </p:nvSpPr>
+        <p:spPr>
+          <a:xfrm>
+            <a:off x="895350" y="4018788"/>
+            <a:ext cx="3060598" cy="534924"/>
+          </a:xfrm>
+          <a:prstGeom prst="rect">
+            <a:avLst/>
+          </a:prstGeom>
+          <a:noFill/>
+          <a:ln>
+            <a:noFill/>
+          </a:ln>
+        </p:spPr>
+        <p:txBody>
+          <a:bodyPr wrap="square" lIns="36576" tIns="27432" rIns="36576" bIns="27432" anchor="t">
+            <a:noAutofit/>
+          </a:bodyPr>
+          <a:lstStyle/>
+          <a:p>
+            <a:pPr algn="l">
+              <a:lnSpc>
+                <a:spcPct val="100000"/>
+              </a:lnSpc>
+            </a:pPr>
+            <a:r>
+              <a:rPr lang="en-US" sz="1575" dirty="0" b="1">
+                <a:solidFill>
+                  <a:srgbClr val="16171D"/>
+                </a:solidFill>
+                <a:latin typeface="Segoe UI"/>
+                <a:cs typeface="Segoe UI"/>
+              </a:rPr>
+              <a:t xml:space="preserve">2.</a:t>
+            </a:r>
+            <a:r>
+              <a:rPr lang="en-US" sz="1575" dirty="0">
+                <a:solidFill>
+                  <a:srgbClr val="16171D"/>
+                </a:solidFill>
+                <a:latin typeface="Segoe UI"/>
+                <a:cs typeface="Segoe UI"/>
+              </a:rPr>
+              <a:t xml:space="preserve"> Inside, the sign flips: minus means right. Right 6.</a:t>
+            </a:r>
+            <a:endParaRPr lang="en-US" sz="1575" dirty="0"/>
+          </a:p>
+        </p:txBody>
+      </p:sp>
+      <p:sp>
+        <p:nvSpPr>
+          <p:cNvPr id="13" name="Shape 13"/>
+          <p:cNvSpPr txBox="1"/>
+          <p:nvPr/>
+        </p:nvSpPr>
+        <p:spPr>
+          <a:xfrm>
+            <a:off x="4355998" y="1618488"/>
+            <a:ext cx="3479698" cy="2866644"/>
           </a:xfrm>
           <a:prstGeom prst="roundRect">
             <a:avLst>
@@ -26835,14 +26943,14 @@
       </p:sp>
       <p:sp>
         <p:nvSpPr>
-          <p:cNvPr id="7" name="Shape 7"/>
-          <p:cNvSpPr txBox="1"/>
-          <p:nvPr/>
-        </p:nvSpPr>
-        <p:spPr>
-          <a:xfrm>
-            <a:off x="895350" y="3232404"/>
-            <a:ext cx="10400995" cy="352044"/>
+          <p:cNvPr id="9" name="Shape 9"/>
+          <p:cNvSpPr txBox="1"/>
+          <p:nvPr/>
+        </p:nvSpPr>
+        <p:spPr>
+          <a:xfrm>
+            <a:off x="4565548" y="1789938"/>
+            <a:ext cx="3060598" cy="649224"/>
           </a:xfrm>
           <a:prstGeom prst="rect">
             <a:avLst/>
@@ -26959,13 +27067,13 @@
       </p:sp>
       <p:sp>
         <p:nvSpPr>
-          <p:cNvPr id="8" name="Shape 8"/>
-          <p:cNvSpPr txBox="1"/>
-          <p:nvPr/>
-        </p:nvSpPr>
-        <p:spPr>
-          <a:xfrm>
-            <a:off x="895350" y="3679698"/>
+          <p:cNvPr id="10" name="Shape 10"/>
+          <p:cNvSpPr txBox="1"/>
+          <p:nvPr/>
+        </p:nvSpPr>
+        <p:spPr>
+          <a:xfrm>
+            <a:off x="4565548" y="2534412"/>
             <a:ext cx="2576368" cy="518922"/>
           </a:xfrm>
           <a:prstGeom prst="roundRect">
@@ -27017,14 +27125,122 @@
       </p:sp>
       <p:sp>
         <p:nvSpPr>
+          <p:cNvPr id="11" name="Shape 11"/>
+          <p:cNvSpPr txBox="1"/>
+          <p:nvPr/>
+        </p:nvSpPr>
+        <p:spPr>
+          <a:xfrm>
+            <a:off x="4565548" y="3148584"/>
+            <a:ext cx="3060598" cy="534924"/>
+          </a:xfrm>
+          <a:prstGeom prst="rect">
+            <a:avLst/>
+          </a:prstGeom>
+          <a:noFill/>
+          <a:ln>
+            <a:noFill/>
+          </a:ln>
+        </p:spPr>
+        <p:txBody>
+          <a:bodyPr wrap="square" lIns="36576" tIns="27432" rIns="36576" bIns="27432" anchor="t">
+            <a:noAutofit/>
+          </a:bodyPr>
+          <a:lstStyle/>
+          <a:p>
+            <a:pPr algn="l">
+              <a:lnSpc>
+                <a:spcPct val="100000"/>
+              </a:lnSpc>
+            </a:pPr>
+            <a:r>
+              <a:rPr lang="en-US" sz="1575" dirty="0" b="1">
+                <a:solidFill>
+                  <a:srgbClr val="16171D"/>
+                </a:solidFill>
+                <a:latin typeface="Segoe UI"/>
+                <a:cs typeface="Segoe UI"/>
+              </a:rPr>
+              <a:t xml:space="preserve">1.</a:t>
+            </a:r>
+            <a:r>
+              <a:rPr lang="en-US" sz="1575" dirty="0">
+                <a:solidFill>
+                  <a:srgbClr val="16171D"/>
+                </a:solidFill>
+                <a:latin typeface="Segoe UI"/>
+                <a:cs typeface="Segoe UI"/>
+              </a:rPr>
+              <a:t xml:space="preserve"> The 1 is outside, so the graph moves up or down.</a:t>
+            </a:r>
+            <a:endParaRPr lang="en-US" sz="1575" dirty="0"/>
+          </a:p>
+        </p:txBody>
+      </p:sp>
+      <p:sp>
+        <p:nvSpPr>
           <p:cNvPr id="12" name="Shape 12"/>
           <p:cNvSpPr txBox="1"/>
           <p:nvPr/>
         </p:nvSpPr>
         <p:spPr>
           <a:xfrm>
-            <a:off x="685800" y="4503420"/>
-            <a:ext cx="10820095" cy="1309116"/>
+            <a:off x="4565548" y="3778758"/>
+            <a:ext cx="3060598" cy="534924"/>
+          </a:xfrm>
+          <a:prstGeom prst="rect">
+            <a:avLst/>
+          </a:prstGeom>
+          <a:noFill/>
+          <a:ln>
+            <a:noFill/>
+          </a:ln>
+        </p:spPr>
+        <p:txBody>
+          <a:bodyPr wrap="square" lIns="36576" tIns="27432" rIns="36576" bIns="27432" anchor="t">
+            <a:noAutofit/>
+          </a:bodyPr>
+          <a:lstStyle/>
+          <a:p>
+            <a:pPr algn="l">
+              <a:lnSpc>
+                <a:spcPct val="100000"/>
+              </a:lnSpc>
+            </a:pPr>
+            <a:r>
+              <a:rPr lang="en-US" sz="1575" dirty="0" b="1">
+                <a:solidFill>
+                  <a:srgbClr val="16171D"/>
+                </a:solidFill>
+                <a:latin typeface="Segoe UI"/>
+                <a:cs typeface="Segoe UI"/>
+              </a:rPr>
+              <a:t xml:space="preserve">2.</a:t>
+            </a:r>
+            <a:r>
+              <a:rPr lang="en-US" sz="1575" dirty="0">
+                <a:solidFill>
+                  <a:srgbClr val="16171D"/>
+                </a:solidFill>
+                <a:latin typeface="Segoe UI"/>
+                <a:cs typeface="Segoe UI"/>
+              </a:rPr>
+              <a:t xml:space="preserve"> Outside, no flip: plus means up. Up 1.</a:t>
+            </a:r>
+            <a:endParaRPr lang="en-US" sz="1575" dirty="0"/>
+          </a:p>
+        </p:txBody>
+      </p:sp>
+      <p:sp>
+        <p:nvSpPr>
+          <p:cNvPr id="18" name="Shape 18"/>
+          <p:cNvSpPr txBox="1"/>
+          <p:nvPr/>
+        </p:nvSpPr>
+        <p:spPr>
+          <a:xfrm>
+            <a:off x="8026197" y="1618488"/>
+            <a:ext cx="3479698" cy="2866644"/>
           </a:xfrm>
           <a:prstGeom prst="roundRect">
             <a:avLst>
@@ -27057,14 +27273,14 @@
       </p:sp>
       <p:sp>
         <p:nvSpPr>
-          <p:cNvPr id="10" name="Shape 10"/>
-          <p:cNvSpPr txBox="1"/>
-          <p:nvPr/>
-        </p:nvSpPr>
-        <p:spPr>
-          <a:xfrm>
-            <a:off x="895350" y="4674870"/>
-            <a:ext cx="10400995" cy="352044"/>
+          <p:cNvPr id="14" name="Shape 14"/>
+          <p:cNvSpPr txBox="1"/>
+          <p:nvPr/>
+        </p:nvSpPr>
+        <p:spPr>
+          <a:xfrm>
+            <a:off x="8235747" y="1789938"/>
+            <a:ext cx="3060598" cy="649224"/>
           </a:xfrm>
           <a:prstGeom prst="rect">
             <a:avLst/>
@@ -27201,13 +27417,13 @@
       </p:sp>
       <p:sp>
         <p:nvSpPr>
-          <p:cNvPr id="11" name="Shape 11"/>
-          <p:cNvSpPr txBox="1"/>
-          <p:nvPr/>
-        </p:nvSpPr>
-        <p:spPr>
-          <a:xfrm>
-            <a:off x="895350" y="5122164"/>
+          <p:cNvPr id="15" name="Shape 15"/>
+          <p:cNvSpPr txBox="1"/>
+          <p:nvPr/>
+        </p:nvSpPr>
+        <p:spPr>
+          <a:xfrm>
+            <a:off x="8235747" y="2534412"/>
             <a:ext cx="2908021" cy="518922"/>
           </a:xfrm>
           <a:prstGeom prst="roundRect">
@@ -27279,7 +27495,115 @@
       </p:sp>
       <p:sp>
         <p:nvSpPr>
-          <p:cNvPr id="13" name="Slide Number 13"/>
+          <p:cNvPr id="16" name="Shape 16"/>
+          <p:cNvSpPr txBox="1"/>
+          <p:nvPr/>
+        </p:nvSpPr>
+        <p:spPr>
+          <a:xfrm>
+            <a:off x="8235747" y="3148584"/>
+            <a:ext cx="3060598" cy="534924"/>
+          </a:xfrm>
+          <a:prstGeom prst="rect">
+            <a:avLst/>
+          </a:prstGeom>
+          <a:noFill/>
+          <a:ln>
+            <a:noFill/>
+          </a:ln>
+        </p:spPr>
+        <p:txBody>
+          <a:bodyPr wrap="square" lIns="36576" tIns="27432" rIns="36576" bIns="27432" anchor="t">
+            <a:noAutofit/>
+          </a:bodyPr>
+          <a:lstStyle/>
+          <a:p>
+            <a:pPr algn="l">
+              <a:lnSpc>
+                <a:spcPct val="100000"/>
+              </a:lnSpc>
+            </a:pPr>
+            <a:r>
+              <a:rPr lang="en-US" sz="1575" dirty="0" b="1">
+                <a:solidFill>
+                  <a:srgbClr val="16171D"/>
+                </a:solidFill>
+                <a:latin typeface="Segoe UI"/>
+                <a:cs typeface="Segoe UI"/>
+              </a:rPr>
+              <a:t xml:space="preserve">1.</a:t>
+            </a:r>
+            <a:r>
+              <a:rPr lang="en-US" sz="1575" dirty="0">
+                <a:solidFill>
+                  <a:srgbClr val="16171D"/>
+                </a:solidFill>
+                <a:latin typeface="Segoe UI"/>
+                <a:cs typeface="Segoe UI"/>
+              </a:rPr>
+              <a:t xml:space="preserve"> Put (x + 1) in for x: j(x + 1) = 3(x + 1).</a:t>
+            </a:r>
+            <a:endParaRPr lang="en-US" sz="1575" dirty="0"/>
+          </a:p>
+        </p:txBody>
+      </p:sp>
+      <p:sp>
+        <p:nvSpPr>
+          <p:cNvPr id="17" name="Shape 17"/>
+          <p:cNvSpPr txBox="1"/>
+          <p:nvPr/>
+        </p:nvSpPr>
+        <p:spPr>
+          <a:xfrm>
+            <a:off x="8235747" y="3778758"/>
+            <a:ext cx="3060598" cy="534924"/>
+          </a:xfrm>
+          <a:prstGeom prst="rect">
+            <a:avLst/>
+          </a:prstGeom>
+          <a:noFill/>
+          <a:ln>
+            <a:noFill/>
+          </a:ln>
+        </p:spPr>
+        <p:txBody>
+          <a:bodyPr wrap="square" lIns="36576" tIns="27432" rIns="36576" bIns="27432" anchor="t">
+            <a:noAutofit/>
+          </a:bodyPr>
+          <a:lstStyle/>
+          <a:p>
+            <a:pPr algn="l">
+              <a:lnSpc>
+                <a:spcPct val="100000"/>
+              </a:lnSpc>
+            </a:pPr>
+            <a:r>
+              <a:rPr lang="en-US" sz="1575" dirty="0" b="1">
+                <a:solidFill>
+                  <a:srgbClr val="16171D"/>
+                </a:solidFill>
+                <a:latin typeface="Segoe UI"/>
+                <a:cs typeface="Segoe UI"/>
+              </a:rPr>
+              <a:t xml:space="preserve">2.</a:t>
+            </a:r>
+            <a:r>
+              <a:rPr lang="en-US" sz="1575" dirty="0">
+                <a:solidFill>
+                  <a:srgbClr val="16171D"/>
+                </a:solidFill>
+                <a:latin typeface="Segoe UI"/>
+                <a:cs typeface="Segoe UI"/>
+              </a:rPr>
+              <a:t xml:space="preserve"> Distribute: 3 · x + 3 · 1 = 3x + 3.</a:t>
+            </a:r>
+            <a:endParaRPr lang="en-US" sz="1575" dirty="0"/>
+          </a:p>
+        </p:txBody>
+      </p:sp>
+      <p:sp>
+        <p:nvSpPr>
+          <p:cNvPr id="19" name="Slide Number 19"/>
           <p:cNvSpPr txBox="1"/>
           <p:nvPr/>
         </p:nvSpPr>
@@ -27439,7 +27763,7 @@
                             </p:stCondLst>
                             <p:childTnLst>
                               <p:par>
-                                <p:cTn id="14" presetID="53" presetClass="entr" presetSubtype="16" fill="hold" nodeType="clickEffect">
+                                <p:cTn id="14" presetID="42" presetClass="entr" presetSubtype="0" fill="hold" nodeType="clickEffect">
                                   <p:stCondLst>
                                     <p:cond delay="0"/>
                                   </p:stCondLst>
@@ -27452,7 +27776,7 @@
                                           </p:stCondLst>
                                         </p:cTn>
                                         <p:tgtEl>
-                                          <p:spTgt spid="8"/>
+                                          <p:spTgt spid="6"/>
                                         </p:tgtEl>
                                         <p:attrNameLst>
                                           <p:attrName>style.visibility</p:attrName>
@@ -27466,7 +27790,7 @@
                                       <p:cBhvr>
                                         <p:cTn id="11" dur="500"/>
                                         <p:tgtEl>
-                                          <p:spTgt spid="8"/>
+                                          <p:spTgt spid="6"/>
                                         </p:tgtEl>
                                       </p:cBhvr>
                                     </p:animEffect>
@@ -27474,7 +27798,205 @@
                                       <p:cBhvr>
                                         <p:cTn id="12" dur="500" fill="hold"/>
                                         <p:tgtEl>
-                                          <p:spTgt spid="8"/>
+                                          <p:spTgt spid="6"/>
+                                        </p:tgtEl>
+                                        <p:attrNameLst>
+                                          <p:attrName>ppt_x</p:attrName>
+                                        </p:attrNameLst>
+                                      </p:cBhvr>
+                                      <p:tavLst>
+                                        <p:tav tm="0">
+                                          <p:val>
+                                            <p:strVal val="#ppt_x"/>
+                                          </p:val>
+                                        </p:tav>
+                                        <p:tav tm="100000">
+                                          <p:val>
+                                            <p:strVal val="#ppt_x"/>
+                                          </p:val>
+                                        </p:tav>
+                                      </p:tavLst>
+                                    </p:anim>
+                                    <p:anim calcmode="lin" valueType="num">
+                                      <p:cBhvr>
+                                        <p:cTn id="13" dur="500" fill="hold"/>
+                                        <p:tgtEl>
+                                          <p:spTgt spid="6"/>
+                                        </p:tgtEl>
+                                        <p:attrNameLst>
+                                          <p:attrName>ppt_y</p:attrName>
+                                        </p:attrNameLst>
+                                      </p:cBhvr>
+                                      <p:tavLst>
+                                        <p:tav tm="0">
+                                          <p:val>
+                                            <p:strVal val="#ppt_y+.1"/>
+                                          </p:val>
+                                        </p:tav>
+                                        <p:tav tm="100000">
+                                          <p:val>
+                                            <p:strVal val="#ppt_y"/>
+                                          </p:val>
+                                        </p:tav>
+                                      </p:tavLst>
+                                    </p:anim>
+                                  </p:childTnLst>
+                                </p:cTn>
+                              </p:par>
+                            </p:childTnLst>
+                          </p:cTn>
+                        </p:par>
+                      </p:childTnLst>
+                    </p:cTn>
+                  </p:par>
+                  <p:par>
+                    <p:cTn id="22" fill="hold">
+                      <p:stCondLst>
+                        <p:cond delay="indefinite"/>
+                      </p:stCondLst>
+                      <p:childTnLst>
+                        <p:par>
+                          <p:cTn id="23" fill="hold">
+                            <p:stCondLst>
+                              <p:cond delay="0"/>
+                            </p:stCondLst>
+                            <p:childTnLst>
+                              <p:par>
+                                <p:cTn id="21" presetID="42" presetClass="entr" presetSubtype="0" fill="hold" nodeType="clickEffect">
+                                  <p:stCondLst>
+                                    <p:cond delay="0"/>
+                                  </p:stCondLst>
+                                  <p:childTnLst>
+                                    <p:set>
+                                      <p:cBhvr>
+                                        <p:cTn id="17" dur="1" fill="hold">
+                                          <p:stCondLst>
+                                            <p:cond delay="0"/>
+                                          </p:stCondLst>
+                                        </p:cTn>
+                                        <p:tgtEl>
+                                          <p:spTgt spid="7"/>
+                                        </p:tgtEl>
+                                        <p:attrNameLst>
+                                          <p:attrName>style.visibility</p:attrName>
+                                        </p:attrNameLst>
+                                      </p:cBhvr>
+                                      <p:to>
+                                        <p:strVal val="visible"/>
+                                      </p:to>
+                                    </p:set>
+                                    <p:animEffect transition="in" filter="fade">
+                                      <p:cBhvr>
+                                        <p:cTn id="18" dur="500"/>
+                                        <p:tgtEl>
+                                          <p:spTgt spid="7"/>
+                                        </p:tgtEl>
+                                      </p:cBhvr>
+                                    </p:animEffect>
+                                    <p:anim calcmode="lin" valueType="num">
+                                      <p:cBhvr>
+                                        <p:cTn id="19" dur="500" fill="hold"/>
+                                        <p:tgtEl>
+                                          <p:spTgt spid="7"/>
+                                        </p:tgtEl>
+                                        <p:attrNameLst>
+                                          <p:attrName>ppt_x</p:attrName>
+                                        </p:attrNameLst>
+                                      </p:cBhvr>
+                                      <p:tavLst>
+                                        <p:tav tm="0">
+                                          <p:val>
+                                            <p:strVal val="#ppt_x"/>
+                                          </p:val>
+                                        </p:tav>
+                                        <p:tav tm="100000">
+                                          <p:val>
+                                            <p:strVal val="#ppt_x"/>
+                                          </p:val>
+                                        </p:tav>
+                                      </p:tavLst>
+                                    </p:anim>
+                                    <p:anim calcmode="lin" valueType="num">
+                                      <p:cBhvr>
+                                        <p:cTn id="20" dur="500" fill="hold"/>
+                                        <p:tgtEl>
+                                          <p:spTgt spid="7"/>
+                                        </p:tgtEl>
+                                        <p:attrNameLst>
+                                          <p:attrName>ppt_y</p:attrName>
+                                        </p:attrNameLst>
+                                      </p:cBhvr>
+                                      <p:tavLst>
+                                        <p:tav tm="0">
+                                          <p:val>
+                                            <p:strVal val="#ppt_y+.1"/>
+                                          </p:val>
+                                        </p:tav>
+                                        <p:tav tm="100000">
+                                          <p:val>
+                                            <p:strVal val="#ppt_y"/>
+                                          </p:val>
+                                        </p:tav>
+                                      </p:tavLst>
+                                    </p:anim>
+                                  </p:childTnLst>
+                                </p:cTn>
+                              </p:par>
+                            </p:childTnLst>
+                          </p:cTn>
+                        </p:par>
+                      </p:childTnLst>
+                    </p:cTn>
+                  </p:par>
+                  <p:par>
+                    <p:cTn id="29" fill="hold">
+                      <p:stCondLst>
+                        <p:cond delay="indefinite"/>
+                      </p:stCondLst>
+                      <p:childTnLst>
+                        <p:par>
+                          <p:cTn id="30" fill="hold">
+                            <p:stCondLst>
+                              <p:cond delay="0"/>
+                            </p:stCondLst>
+                            <p:childTnLst>
+                              <p:par>
+                                <p:cTn id="28" presetID="53" presetClass="entr" presetSubtype="16" fill="hold" nodeType="clickEffect">
+                                  <p:stCondLst>
+                                    <p:cond delay="0"/>
+                                  </p:stCondLst>
+                                  <p:childTnLst>
+                                    <p:set>
+                                      <p:cBhvr>
+                                        <p:cTn id="24" dur="1" fill="hold">
+                                          <p:stCondLst>
+                                            <p:cond delay="0"/>
+                                          </p:stCondLst>
+                                        </p:cTn>
+                                        <p:tgtEl>
+                                          <p:spTgt spid="10"/>
+                                        </p:tgtEl>
+                                        <p:attrNameLst>
+                                          <p:attrName>style.visibility</p:attrName>
+                                        </p:attrNameLst>
+                                      </p:cBhvr>
+                                      <p:to>
+                                        <p:strVal val="visible"/>
+                                      </p:to>
+                                    </p:set>
+                                    <p:animEffect transition="in" filter="fade">
+                                      <p:cBhvr>
+                                        <p:cTn id="25" dur="500"/>
+                                        <p:tgtEl>
+                                          <p:spTgt spid="10"/>
+                                        </p:tgtEl>
+                                      </p:cBhvr>
+                                    </p:animEffect>
+                                    <p:anim calcmode="lin" valueType="num">
+                                      <p:cBhvr>
+                                        <p:cTn id="26" dur="500" fill="hold"/>
+                                        <p:tgtEl>
+                                          <p:spTgt spid="10"/>
                                         </p:tgtEl>
                                         <p:attrNameLst>
                                           <p:attrName>ppt_w</p:attrName>
@@ -27495,9 +28017,9 @@
                                     </p:anim>
                                     <p:anim calcmode="lin" valueType="num">
                                       <p:cBhvr>
-                                        <p:cTn id="13" dur="500" fill="hold"/>
+                                        <p:cTn id="27" dur="500" fill="hold"/>
                                         <p:tgtEl>
-                                          <p:spTgt spid="8"/>
+                                          <p:spTgt spid="10"/>
                                         </p:tgtEl>
                                         <p:attrNameLst>
                                           <p:attrName>ppt_h</p:attrName>
@@ -27526,26 +28048,26 @@
                     </p:cTn>
                   </p:par>
                   <p:par>
-                    <p:cTn id="22" fill="hold">
+                    <p:cTn id="36" fill="hold">
                       <p:stCondLst>
                         <p:cond delay="indefinite"/>
                       </p:stCondLst>
                       <p:childTnLst>
                         <p:par>
-                          <p:cTn id="23" fill="hold">
+                          <p:cTn id="37" fill="hold">
                             <p:stCondLst>
                               <p:cond delay="0"/>
                             </p:stCondLst>
                             <p:childTnLst>
                               <p:par>
-                                <p:cTn id="21" presetID="53" presetClass="entr" presetSubtype="16" fill="hold" nodeType="clickEffect">
+                                <p:cTn id="35" presetID="42" presetClass="entr" presetSubtype="0" fill="hold" nodeType="clickEffect">
                                   <p:stCondLst>
                                     <p:cond delay="0"/>
                                   </p:stCondLst>
                                   <p:childTnLst>
                                     <p:set>
                                       <p:cBhvr>
-                                        <p:cTn id="17" dur="1" fill="hold">
+                                        <p:cTn id="31" dur="1" fill="hold">
                                           <p:stCondLst>
                                             <p:cond delay="0"/>
                                           </p:stCondLst>
@@ -27563,7 +28085,7 @@
                                     </p:set>
                                     <p:animEffect transition="in" filter="fade">
                                       <p:cBhvr>
-                                        <p:cTn id="18" dur="500"/>
+                                        <p:cTn id="32" dur="500"/>
                                         <p:tgtEl>
                                           <p:spTgt spid="11"/>
                                         </p:tgtEl>
@@ -27571,9 +28093,207 @@
                                     </p:animEffect>
                                     <p:anim calcmode="lin" valueType="num">
                                       <p:cBhvr>
-                                        <p:cTn id="19" dur="500" fill="hold"/>
+                                        <p:cTn id="33" dur="500" fill="hold"/>
                                         <p:tgtEl>
                                           <p:spTgt spid="11"/>
+                                        </p:tgtEl>
+                                        <p:attrNameLst>
+                                          <p:attrName>ppt_x</p:attrName>
+                                        </p:attrNameLst>
+                                      </p:cBhvr>
+                                      <p:tavLst>
+                                        <p:tav tm="0">
+                                          <p:val>
+                                            <p:strVal val="#ppt_x"/>
+                                          </p:val>
+                                        </p:tav>
+                                        <p:tav tm="100000">
+                                          <p:val>
+                                            <p:strVal val="#ppt_x"/>
+                                          </p:val>
+                                        </p:tav>
+                                      </p:tavLst>
+                                    </p:anim>
+                                    <p:anim calcmode="lin" valueType="num">
+                                      <p:cBhvr>
+                                        <p:cTn id="34" dur="500" fill="hold"/>
+                                        <p:tgtEl>
+                                          <p:spTgt spid="11"/>
+                                        </p:tgtEl>
+                                        <p:attrNameLst>
+                                          <p:attrName>ppt_y</p:attrName>
+                                        </p:attrNameLst>
+                                      </p:cBhvr>
+                                      <p:tavLst>
+                                        <p:tav tm="0">
+                                          <p:val>
+                                            <p:strVal val="#ppt_y+.1"/>
+                                          </p:val>
+                                        </p:tav>
+                                        <p:tav tm="100000">
+                                          <p:val>
+                                            <p:strVal val="#ppt_y"/>
+                                          </p:val>
+                                        </p:tav>
+                                      </p:tavLst>
+                                    </p:anim>
+                                  </p:childTnLst>
+                                </p:cTn>
+                              </p:par>
+                            </p:childTnLst>
+                          </p:cTn>
+                        </p:par>
+                      </p:childTnLst>
+                    </p:cTn>
+                  </p:par>
+                  <p:par>
+                    <p:cTn id="43" fill="hold">
+                      <p:stCondLst>
+                        <p:cond delay="indefinite"/>
+                      </p:stCondLst>
+                      <p:childTnLst>
+                        <p:par>
+                          <p:cTn id="44" fill="hold">
+                            <p:stCondLst>
+                              <p:cond delay="0"/>
+                            </p:stCondLst>
+                            <p:childTnLst>
+                              <p:par>
+                                <p:cTn id="42" presetID="42" presetClass="entr" presetSubtype="0" fill="hold" nodeType="clickEffect">
+                                  <p:stCondLst>
+                                    <p:cond delay="0"/>
+                                  </p:stCondLst>
+                                  <p:childTnLst>
+                                    <p:set>
+                                      <p:cBhvr>
+                                        <p:cTn id="38" dur="1" fill="hold">
+                                          <p:stCondLst>
+                                            <p:cond delay="0"/>
+                                          </p:stCondLst>
+                                        </p:cTn>
+                                        <p:tgtEl>
+                                          <p:spTgt spid="12"/>
+                                        </p:tgtEl>
+                                        <p:attrNameLst>
+                                          <p:attrName>style.visibility</p:attrName>
+                                        </p:attrNameLst>
+                                      </p:cBhvr>
+                                      <p:to>
+                                        <p:strVal val="visible"/>
+                                      </p:to>
+                                    </p:set>
+                                    <p:animEffect transition="in" filter="fade">
+                                      <p:cBhvr>
+                                        <p:cTn id="39" dur="500"/>
+                                        <p:tgtEl>
+                                          <p:spTgt spid="12"/>
+                                        </p:tgtEl>
+                                      </p:cBhvr>
+                                    </p:animEffect>
+                                    <p:anim calcmode="lin" valueType="num">
+                                      <p:cBhvr>
+                                        <p:cTn id="40" dur="500" fill="hold"/>
+                                        <p:tgtEl>
+                                          <p:spTgt spid="12"/>
+                                        </p:tgtEl>
+                                        <p:attrNameLst>
+                                          <p:attrName>ppt_x</p:attrName>
+                                        </p:attrNameLst>
+                                      </p:cBhvr>
+                                      <p:tavLst>
+                                        <p:tav tm="0">
+                                          <p:val>
+                                            <p:strVal val="#ppt_x"/>
+                                          </p:val>
+                                        </p:tav>
+                                        <p:tav tm="100000">
+                                          <p:val>
+                                            <p:strVal val="#ppt_x"/>
+                                          </p:val>
+                                        </p:tav>
+                                      </p:tavLst>
+                                    </p:anim>
+                                    <p:anim calcmode="lin" valueType="num">
+                                      <p:cBhvr>
+                                        <p:cTn id="41" dur="500" fill="hold"/>
+                                        <p:tgtEl>
+                                          <p:spTgt spid="12"/>
+                                        </p:tgtEl>
+                                        <p:attrNameLst>
+                                          <p:attrName>ppt_y</p:attrName>
+                                        </p:attrNameLst>
+                                      </p:cBhvr>
+                                      <p:tavLst>
+                                        <p:tav tm="0">
+                                          <p:val>
+                                            <p:strVal val="#ppt_y+.1"/>
+                                          </p:val>
+                                        </p:tav>
+                                        <p:tav tm="100000">
+                                          <p:val>
+                                            <p:strVal val="#ppt_y"/>
+                                          </p:val>
+                                        </p:tav>
+                                      </p:tavLst>
+                                    </p:anim>
+                                  </p:childTnLst>
+                                </p:cTn>
+                              </p:par>
+                            </p:childTnLst>
+                          </p:cTn>
+                        </p:par>
+                      </p:childTnLst>
+                    </p:cTn>
+                  </p:par>
+                  <p:par>
+                    <p:cTn id="50" fill="hold">
+                      <p:stCondLst>
+                        <p:cond delay="indefinite"/>
+                      </p:stCondLst>
+                      <p:childTnLst>
+                        <p:par>
+                          <p:cTn id="51" fill="hold">
+                            <p:stCondLst>
+                              <p:cond delay="0"/>
+                            </p:stCondLst>
+                            <p:childTnLst>
+                              <p:par>
+                                <p:cTn id="49" presetID="53" presetClass="entr" presetSubtype="16" fill="hold" nodeType="clickEffect">
+                                  <p:stCondLst>
+                                    <p:cond delay="0"/>
+                                  </p:stCondLst>
+                                  <p:childTnLst>
+                                    <p:set>
+                                      <p:cBhvr>
+                                        <p:cTn id="45" dur="1" fill="hold">
+                                          <p:stCondLst>
+                                            <p:cond delay="0"/>
+                                          </p:stCondLst>
+                                        </p:cTn>
+                                        <p:tgtEl>
+                                          <p:spTgt spid="15"/>
+                                        </p:tgtEl>
+                                        <p:attrNameLst>
+                                          <p:attrName>style.visibility</p:attrName>
+                                        </p:attrNameLst>
+                                      </p:cBhvr>
+                                      <p:to>
+                                        <p:strVal val="visible"/>
+                                      </p:to>
+                                    </p:set>
+                                    <p:animEffect transition="in" filter="fade">
+                                      <p:cBhvr>
+                                        <p:cTn id="46" dur="500"/>
+                                        <p:tgtEl>
+                                          <p:spTgt spid="15"/>
+                                        </p:tgtEl>
+                                      </p:cBhvr>
+                                    </p:animEffect>
+                                    <p:anim calcmode="lin" valueType="num">
+                                      <p:cBhvr>
+                                        <p:cTn id="47" dur="500" fill="hold"/>
+                                        <p:tgtEl>
+                                          <p:spTgt spid="15"/>
                                         </p:tgtEl>
                                         <p:attrNameLst>
                                           <p:attrName>ppt_w</p:attrName>
@@ -27594,9 +28314,9 @@
                                     </p:anim>
                                     <p:anim calcmode="lin" valueType="num">
                                       <p:cBhvr>
-                                        <p:cTn id="20" dur="500" fill="hold"/>
+                                        <p:cTn id="48" dur="500" fill="hold"/>
                                         <p:tgtEl>
-                                          <p:spTgt spid="11"/>
+                                          <p:spTgt spid="15"/>
                                         </p:tgtEl>
                                         <p:attrNameLst>
                                           <p:attrName>ppt_h</p:attrName>
@@ -27611,6 +28331,204 @@
                                         <p:tav tm="100000">
                                           <p:val>
                                             <p:strVal val="#ppt_h"/>
+                                          </p:val>
+                                        </p:tav>
+                                      </p:tavLst>
+                                    </p:anim>
+                                  </p:childTnLst>
+                                </p:cTn>
+                              </p:par>
+                            </p:childTnLst>
+                          </p:cTn>
+                        </p:par>
+                      </p:childTnLst>
+                    </p:cTn>
+                  </p:par>
+                  <p:par>
+                    <p:cTn id="57" fill="hold">
+                      <p:stCondLst>
+                        <p:cond delay="indefinite"/>
+                      </p:stCondLst>
+                      <p:childTnLst>
+                        <p:par>
+                          <p:cTn id="58" fill="hold">
+                            <p:stCondLst>
+                              <p:cond delay="0"/>
+                            </p:stCondLst>
+                            <p:childTnLst>
+                              <p:par>
+                                <p:cTn id="56" presetID="42" presetClass="entr" presetSubtype="0" fill="hold" nodeType="clickEffect">
+                                  <p:stCondLst>
+                                    <p:cond delay="0"/>
+                                  </p:stCondLst>
+                                  <p:childTnLst>
+                                    <p:set>
+                                      <p:cBhvr>
+                                        <p:cTn id="52" dur="1" fill="hold">
+                                          <p:stCondLst>
+                                            <p:cond delay="0"/>
+                                          </p:stCondLst>
+                                        </p:cTn>
+                                        <p:tgtEl>
+                                          <p:spTgt spid="16"/>
+                                        </p:tgtEl>
+                                        <p:attrNameLst>
+                                          <p:attrName>style.visibility</p:attrName>
+                                        </p:attrNameLst>
+                                      </p:cBhvr>
+                                      <p:to>
+                                        <p:strVal val="visible"/>
+                                      </p:to>
+                                    </p:set>
+                                    <p:animEffect transition="in" filter="fade">
+                                      <p:cBhvr>
+                                        <p:cTn id="53" dur="500"/>
+                                        <p:tgtEl>
+                                          <p:spTgt spid="16"/>
+                                        </p:tgtEl>
+                                      </p:cBhvr>
+                                    </p:animEffect>
+                                    <p:anim calcmode="lin" valueType="num">
+                                      <p:cBhvr>
+                                        <p:cTn id="54" dur="500" fill="hold"/>
+                                        <p:tgtEl>
+                                          <p:spTgt spid="16"/>
+                                        </p:tgtEl>
+                                        <p:attrNameLst>
+                                          <p:attrName>ppt_x</p:attrName>
+                                        </p:attrNameLst>
+                                      </p:cBhvr>
+                                      <p:tavLst>
+                                        <p:tav tm="0">
+                                          <p:val>
+                                            <p:strVal val="#ppt_x"/>
+                                          </p:val>
+                                        </p:tav>
+                                        <p:tav tm="100000">
+                                          <p:val>
+                                            <p:strVal val="#ppt_x"/>
+                                          </p:val>
+                                        </p:tav>
+                                      </p:tavLst>
+                                    </p:anim>
+                                    <p:anim calcmode="lin" valueType="num">
+                                      <p:cBhvr>
+                                        <p:cTn id="55" dur="500" fill="hold"/>
+                                        <p:tgtEl>
+                                          <p:spTgt spid="16"/>
+                                        </p:tgtEl>
+                                        <p:attrNameLst>
+                                          <p:attrName>ppt_y</p:attrName>
+                                        </p:attrNameLst>
+                                      </p:cBhvr>
+                                      <p:tavLst>
+                                        <p:tav tm="0">
+                                          <p:val>
+                                            <p:strVal val="#ppt_y+.1"/>
+                                          </p:val>
+                                        </p:tav>
+                                        <p:tav tm="100000">
+                                          <p:val>
+                                            <p:strVal val="#ppt_y"/>
+                                          </p:val>
+                                        </p:tav>
+                                      </p:tavLst>
+                                    </p:anim>
+                                  </p:childTnLst>
+                                </p:cTn>
+                              </p:par>
+                            </p:childTnLst>
+                          </p:cTn>
+                        </p:par>
+                      </p:childTnLst>
+                    </p:cTn>
+                  </p:par>
+                  <p:par>
+                    <p:cTn id="64" fill="hold">
+                      <p:stCondLst>
+                        <p:cond delay="indefinite"/>
+                      </p:stCondLst>
+                      <p:childTnLst>
+                        <p:par>
+                          <p:cTn id="65" fill="hold">
+                            <p:stCondLst>
+                              <p:cond delay="0"/>
+                            </p:stCondLst>
+                            <p:childTnLst>
+                              <p:par>
+                                <p:cTn id="63" presetID="42" presetClass="entr" presetSubtype="0" fill="hold" nodeType="clickEffect">
+                                  <p:stCondLst>
+                                    <p:cond delay="0"/>
+                                  </p:stCondLst>
+                                  <p:childTnLst>
+                                    <p:set>
+                                      <p:cBhvr>
+                                        <p:cTn id="59" dur="1" fill="hold">
+                                          <p:stCondLst>
+                                            <p:cond delay="0"/>
+                                          </p:stCondLst>
+                                        </p:cTn>
+                                        <p:tgtEl>
+                                          <p:spTgt spid="17"/>
+                                        </p:tgtEl>
+                                        <p:attrNameLst>
+                                          <p:attrName>style.visibility</p:attrName>
+                                        </p:attrNameLst>
+                                      </p:cBhvr>
+                                      <p:to>
+                                        <p:strVal val="visible"/>
+                                      </p:to>
+                                    </p:set>
+                                    <p:animEffect transition="in" filter="fade">
+                                      <p:cBhvr>
+                                        <p:cTn id="60" dur="500"/>
+                                        <p:tgtEl>
+                                          <p:spTgt spid="17"/>
+                                        </p:tgtEl>
+                                      </p:cBhvr>
+                                    </p:animEffect>
+                                    <p:anim calcmode="lin" valueType="num">
+                                      <p:cBhvr>
+                                        <p:cTn id="61" dur="500" fill="hold"/>
+                                        <p:tgtEl>
+                                          <p:spTgt spid="17"/>
+                                        </p:tgtEl>
+                                        <p:attrNameLst>
+                                          <p:attrName>ppt_x</p:attrName>
+                                        </p:attrNameLst>
+                                      </p:cBhvr>
+                                      <p:tavLst>
+                                        <p:tav tm="0">
+                                          <p:val>
+                                            <p:strVal val="#ppt_x"/>
+                                          </p:val>
+                                        </p:tav>
+                                        <p:tav tm="100000">
+                                          <p:val>
+                                            <p:strVal val="#ppt_x"/>
+                                          </p:val>
+                                        </p:tav>
+                                      </p:tavLst>
+                                    </p:anim>
+                                    <p:anim calcmode="lin" valueType="num">
+                                      <p:cBhvr>
+                                        <p:cTn id="62" dur="500" fill="hold"/>
+                                        <p:tgtEl>
+                                          <p:spTgt spid="17"/>
+                                        </p:tgtEl>
+                                        <p:attrNameLst>
+                                          <p:attrName>ppt_y</p:attrName>
+                                        </p:attrNameLst>
+                                      </p:cBhvr>
+                                      <p:tavLst>
+                                        <p:tav tm="0">
+                                          <p:val>
+                                            <p:strVal val="#ppt_y+.1"/>
+                                          </p:val>
+                                        </p:tav>
+                                        <p:tav tm="100000">
+                                          <p:val>
+                                            <p:strVal val="#ppt_y"/>
                                           </p:val>
                                         </p:tav>
                                       </p:tavLst>

--- a/IEP/t2-lesson2-vertical-horizontal-transformations-IEP-catchup.pptx
+++ b/IEP/t2-lesson2-vertical-horizontal-transformations-IEP-catchup.pptx
@@ -17625,7 +17625,7 @@
                 <a:latin typeface="Segoe UI"/>
                 <a:cs typeface="Segoe UI"/>
               </a:rPr>
-              <a:t xml:space="preserve"> For </a:t>
+              <a:t xml:space="preserve"> The graph of </a:t>
             </a:r>
             <a:r>
               <a:rPr lang="en-US" sz="1575" dirty="0" i="1">
@@ -17665,7 +17665,7 @@
                 <a:latin typeface="Cambria"/>
                 <a:cs typeface="Cambria"/>
               </a:rPr>
-              <a:t xml:space="preserve">) = </a:t>
+              <a:t xml:space="preserve">) = 3</a:t>
             </a:r>
             <a:r>
               <a:rPr lang="en-US" sz="1575" dirty="0" i="1">
@@ -17685,117 +17685,7 @@
                 <a:latin typeface="Segoe UI"/>
                 <a:cs typeface="Segoe UI"/>
               </a:rPr>
-              <a:t xml:space="preserve">, is the graph of </a:t>
-            </a:r>
-            <a:r>
-              <a:rPr lang="en-US" sz="1575" dirty="0" i="1">
-                <a:solidFill>
-                  <a:srgbClr val="16171D"/>
-                </a:solidFill>
-                <a:latin typeface="Cambria"/>
-                <a:cs typeface="Cambria"/>
-              </a:rPr>
-              <a:t xml:space="preserve">f</a:t>
-            </a:r>
-            <a:r>
-              <a:rPr lang="en-US" sz="1575" dirty="0">
-                <a:solidFill>
-                  <a:srgbClr val="16171D"/>
-                </a:solidFill>
-                <a:latin typeface="Cambria"/>
-                <a:cs typeface="Cambria"/>
-              </a:rPr>
-              <a:t xml:space="preserve">(2</a:t>
-            </a:r>
-            <a:r>
-              <a:rPr lang="en-US" sz="1575" dirty="0" i="1">
-                <a:solidFill>
-                  <a:srgbClr val="16171D"/>
-                </a:solidFill>
-                <a:latin typeface="Cambria"/>
-                <a:cs typeface="Cambria"/>
-              </a:rPr>
-              <a:t xml:space="preserve">x</a:t>
-            </a:r>
-            <a:r>
-              <a:rPr lang="en-US" sz="1575" dirty="0">
-                <a:solidFill>
-                  <a:srgbClr val="16171D"/>
-                </a:solidFill>
-                <a:latin typeface="Cambria"/>
-                <a:cs typeface="Cambria"/>
-              </a:rPr>
-              <a:t xml:space="preserve">)</a:t>
-            </a:r>
-            <a:r>
-              <a:rPr lang="en-US" sz="1575" dirty="0">
-                <a:solidFill>
-                  <a:srgbClr val="16171D"/>
-                </a:solidFill>
-                <a:latin typeface="Segoe UI"/>
-                <a:cs typeface="Segoe UI"/>
-              </a:rPr>
-              <a:t xml:space="preserve"> the same as the graph of </a:t>
-            </a:r>
-            <a:r>
-              <a:rPr lang="en-US" sz="1575" dirty="0">
-                <a:solidFill>
-                  <a:srgbClr val="16171D"/>
-                </a:solidFill>
-                <a:latin typeface="Cambria"/>
-                <a:cs typeface="Cambria"/>
-              </a:rPr>
-              <a:t xml:space="preserve">2</a:t>
-            </a:r>
-            <a:r>
-              <a:rPr lang="en-US" sz="1575" dirty="0" i="1">
-                <a:solidFill>
-                  <a:srgbClr val="16171D"/>
-                </a:solidFill>
-                <a:latin typeface="Cambria"/>
-                <a:cs typeface="Cambria"/>
-              </a:rPr>
-              <a:t xml:space="preserve">f</a:t>
-            </a:r>
-            <a:r>
-              <a:rPr lang="en-US" sz="1575" dirty="0">
-                <a:solidFill>
-                  <a:srgbClr val="16171D"/>
-                </a:solidFill>
-                <a:latin typeface="Cambria"/>
-                <a:cs typeface="Cambria"/>
-              </a:rPr>
-              <a:t xml:space="preserve">(</a:t>
-            </a:r>
-            <a:r>
-              <a:rPr lang="en-US" sz="1575" dirty="0" i="1">
-                <a:solidFill>
-                  <a:srgbClr val="16171D"/>
-                </a:solidFill>
-                <a:latin typeface="Cambria"/>
-                <a:cs typeface="Cambria"/>
-              </a:rPr>
-              <a:t xml:space="preserve">x</a:t>
-            </a:r>
-            <a:r>
-              <a:rPr lang="en-US" sz="1575" dirty="0">
-                <a:solidFill>
-                  <a:srgbClr val="16171D"/>
-                </a:solidFill>
-                <a:latin typeface="Cambria"/>
-                <a:cs typeface="Cambria"/>
-              </a:rPr>
-              <a:t xml:space="preserve">)</a:t>
-            </a:r>
-            <a:r>
-              <a:rPr lang="en-US" sz="1575" dirty="0">
-                <a:solidFill>
-                  <a:srgbClr val="16171D"/>
-                </a:solidFill>
-                <a:latin typeface="Segoe UI"/>
-                <a:cs typeface="Segoe UI"/>
-              </a:rPr>
-              <a:t xml:space="preserve">?</a:t>
+              <a:t xml:space="preserve"> is translated right 2 units. Which function represents the new graph?</a:t>
             </a:r>
             <a:endParaRPr lang="en-US" sz="1575" dirty="0"/>
           </a:p>
@@ -17849,7 +17739,7 @@
                 <a:latin typeface="Segoe UI"/>
                 <a:cs typeface="Segoe UI"/>
               </a:rPr>
-              <a:t xml:space="preserve"> inside: </a:t>
+              <a:t xml:space="preserve"> right </a:t>
             </a:r>
             <a:r>
               <a:rPr lang="en-US" sz="1575" dirty="0" i="1">
@@ -17859,6 +17749,26 @@
                 <a:latin typeface="Cambria"/>
                 <a:cs typeface="Cambria"/>
               </a:rPr>
+              <a:t xml:space="preserve">c</a:t>
+            </a:r>
+            <a:r>
+              <a:rPr lang="en-US" sz="1575" dirty="0">
+                <a:solidFill>
+                  <a:srgbClr val="16171D"/>
+                </a:solidFill>
+                <a:latin typeface="Segoe UI"/>
+                <a:cs typeface="Segoe UI"/>
+              </a:rPr>
+              <a:t xml:space="preserve">: </a:t>
+            </a:r>
+            <a:r>
+              <a:rPr lang="en-US" sz="1575" dirty="0" i="1">
+                <a:solidFill>
+                  <a:srgbClr val="16171D"/>
+                </a:solidFill>
+                <a:latin typeface="Cambria"/>
+                <a:cs typeface="Cambria"/>
+              </a:rPr>
               <a:t xml:space="preserve">f</a:t>
             </a:r>
             <a:r>
@@ -17869,7 +17779,7 @@
                 <a:latin typeface="Cambria"/>
                 <a:cs typeface="Cambria"/>
               </a:rPr>
-              <a:t xml:space="preserve">(2</a:t>
+              <a:t xml:space="preserve">(</a:t>
             </a:r>
             <a:r>
               <a:rPr lang="en-US" sz="1575" dirty="0" i="1">
@@ -17889,6 +17799,26 @@
                 <a:latin typeface="Cambria"/>
                 <a:cs typeface="Cambria"/>
               </a:rPr>
+              <a:t xml:space="preserve"> − </a:t>
+            </a:r>
+            <a:r>
+              <a:rPr lang="en-US" sz="1575" dirty="0" i="1">
+                <a:solidFill>
+                  <a:srgbClr val="16171D"/>
+                </a:solidFill>
+                <a:latin typeface="Cambria"/>
+                <a:cs typeface="Cambria"/>
+              </a:rPr>
+              <a:t xml:space="preserve">c</a:t>
+            </a:r>
+            <a:r>
+              <a:rPr lang="en-US" sz="1575" dirty="0">
+                <a:solidFill>
+                  <a:srgbClr val="16171D"/>
+                </a:solidFill>
+                <a:latin typeface="Cambria"/>
+                <a:cs typeface="Cambria"/>
+              </a:rPr>
               <a:t xml:space="preserve">)</a:t>
             </a:r>
             <a:r>
@@ -17899,57 +17829,7 @@
                 <a:latin typeface="Segoe UI"/>
                 <a:cs typeface="Segoe UI"/>
               </a:rPr>
-              <a:t xml:space="preserve"> · outside: </a:t>
-            </a:r>
-            <a:r>
-              <a:rPr lang="en-US" sz="1575" dirty="0">
-                <a:solidFill>
-                  <a:srgbClr val="16171D"/>
-                </a:solidFill>
-                <a:latin typeface="Cambria"/>
-                <a:cs typeface="Cambria"/>
-              </a:rPr>
-              <a:t xml:space="preserve">2</a:t>
-            </a:r>
-            <a:r>
-              <a:rPr lang="en-US" sz="1575" dirty="0" i="1">
-                <a:solidFill>
-                  <a:srgbClr val="16171D"/>
-                </a:solidFill>
-                <a:latin typeface="Cambria"/>
-                <a:cs typeface="Cambria"/>
-              </a:rPr>
-              <a:t xml:space="preserve">f</a:t>
-            </a:r>
-            <a:r>
-              <a:rPr lang="en-US" sz="1575" dirty="0">
-                <a:solidFill>
-                  <a:srgbClr val="16171D"/>
-                </a:solidFill>
-                <a:latin typeface="Cambria"/>
-                <a:cs typeface="Cambria"/>
-              </a:rPr>
-              <a:t xml:space="preserve">(</a:t>
-            </a:r>
-            <a:r>
-              <a:rPr lang="en-US" sz="1575" dirty="0" i="1">
-                <a:solidFill>
-                  <a:srgbClr val="16171D"/>
-                </a:solidFill>
-                <a:latin typeface="Cambria"/>
-                <a:cs typeface="Cambria"/>
-              </a:rPr>
-              <a:t xml:space="preserve">x</a:t>
-            </a:r>
-            <a:r>
-              <a:rPr lang="en-US" sz="1575" dirty="0">
-                <a:solidFill>
-                  <a:srgbClr val="16171D"/>
-                </a:solidFill>
-                <a:latin typeface="Cambria"/>
-                <a:cs typeface="Cambria"/>
-              </a:rPr>
-              <a:t xml:space="preserve">)</a:t>
+              <a:t xml:space="preserve">, then distribute</a:t>
             </a:r>
             <a:endParaRPr lang="en-US" sz="1575" dirty="0"/>
           </a:p>
@@ -17964,7 +17844,7 @@
         <p:spPr>
           <a:xfrm>
             <a:off x="6419698" y="5111496"/>
-            <a:ext cx="4251503" cy="1033272"/>
+            <a:ext cx="4155731" cy="1033272"/>
           </a:xfrm>
           <a:prstGeom prst="roundRect">
             <a:avLst>
@@ -18000,14 +17880,24 @@
               <a:t xml:space="preserve">ANSWER   </a:t>
             </a:r>
             <a:r>
+              <a:rPr lang="en-US" sz="1425" dirty="0" b="1" i="1">
+                <a:solidFill>
+                  <a:srgbClr val="16171D"/>
+                </a:solidFill>
+                <a:latin typeface="Cambria"/>
+                <a:cs typeface="Cambria"/>
+              </a:rPr>
+              <a:t xml:space="preserve">g</a:t>
+            </a:r>
+            <a:r>
               <a:rPr lang="en-US" sz="1425" dirty="0" b="1">
                 <a:solidFill>
                   <a:srgbClr val="16171D"/>
                 </a:solidFill>
-                <a:latin typeface="Segoe UI"/>
-                <a:cs typeface="Segoe UI"/>
-              </a:rPr>
-              <a:t xml:space="preserve">Yes, both are </a:t>
+                <a:latin typeface="Cambria"/>
+                <a:cs typeface="Cambria"/>
+              </a:rPr>
+              <a:t xml:space="preserve">(</a:t>
             </a:r>
             <a:r>
               <a:rPr lang="en-US" sz="1425" dirty="0" b="1" i="1">
@@ -18017,7 +17907,7 @@
                 <a:latin typeface="Cambria"/>
                 <a:cs typeface="Cambria"/>
               </a:rPr>
-              <a:t xml:space="preserve">y</a:t>
+              <a:t xml:space="preserve">x</a:t>
             </a:r>
             <a:r>
               <a:rPr lang="en-US" sz="1425" dirty="0" b="1">
@@ -18027,7 +17917,7 @@
                 <a:latin typeface="Cambria"/>
                 <a:cs typeface="Cambria"/>
               </a:rPr>
-              <a:t xml:space="preserve"> = 2</a:t>
+              <a:t xml:space="preserve">) = 3</a:t>
             </a:r>
             <a:r>
               <a:rPr lang="en-US" sz="1425" dirty="0" b="1" i="1">
@@ -18038,6 +17928,16 @@
                 <a:cs typeface="Cambria"/>
               </a:rPr>
               <a:t xml:space="preserve">x</a:t>
+            </a:r>
+            <a:r>
+              <a:rPr lang="en-US" sz="1425" dirty="0" b="1">
+                <a:solidFill>
+                  <a:srgbClr val="16171D"/>
+                </a:solidFill>
+                <a:latin typeface="Cambria"/>
+                <a:cs typeface="Cambria"/>
+              </a:rPr>
+              <a:t xml:space="preserve"> − 6</a:t>
             </a:r>
             <a:br>
               <a:rPr lang="en-US" sz="1425" dirty="0">
@@ -18066,7 +17966,7 @@
                 <a:latin typeface="Segoe UI"/>
                 <a:cs typeface="Segoe UI"/>
               </a:rPr>
-              <a:t xml:space="preserve"> </a:t>
+              <a:t xml:space="preserve"> Right 2: </a:t>
             </a:r>
             <a:r>
               <a:rPr lang="en-US" sz="1425" dirty="0" i="1">
@@ -18076,6 +17976,46 @@
                 <a:latin typeface="Cambria"/>
                 <a:cs typeface="Cambria"/>
               </a:rPr>
+              <a:t xml:space="preserve">g</a:t>
+            </a:r>
+            <a:r>
+              <a:rPr lang="en-US" sz="1425" dirty="0">
+                <a:solidFill>
+                  <a:srgbClr val="16171D"/>
+                </a:solidFill>
+                <a:latin typeface="Cambria"/>
+                <a:cs typeface="Cambria"/>
+              </a:rPr>
+              <a:t xml:space="preserve">(</a:t>
+            </a:r>
+            <a:r>
+              <a:rPr lang="en-US" sz="1425" dirty="0" i="1">
+                <a:solidFill>
+                  <a:srgbClr val="16171D"/>
+                </a:solidFill>
+                <a:latin typeface="Cambria"/>
+                <a:cs typeface="Cambria"/>
+              </a:rPr>
+              <a:t xml:space="preserve">x</a:t>
+            </a:r>
+            <a:r>
+              <a:rPr lang="en-US" sz="1425" dirty="0">
+                <a:solidFill>
+                  <a:srgbClr val="16171D"/>
+                </a:solidFill>
+                <a:latin typeface="Cambria"/>
+                <a:cs typeface="Cambria"/>
+              </a:rPr>
+              <a:t xml:space="preserve">) = </a:t>
+            </a:r>
+            <a:r>
+              <a:rPr lang="en-US" sz="1425" dirty="0" i="1">
+                <a:solidFill>
+                  <a:srgbClr val="16171D"/>
+                </a:solidFill>
+                <a:latin typeface="Cambria"/>
+                <a:cs typeface="Cambria"/>
+              </a:rPr>
               <a:t xml:space="preserve">f</a:t>
             </a:r>
             <a:r>
@@ -18086,7 +18026,7 @@
                 <a:latin typeface="Cambria"/>
                 <a:cs typeface="Cambria"/>
               </a:rPr>
-              <a:t xml:space="preserve">(2</a:t>
+              <a:t xml:space="preserve">(</a:t>
             </a:r>
             <a:r>
               <a:rPr lang="en-US" sz="1425" dirty="0" i="1">
@@ -18106,87 +18046,27 @@
                 <a:latin typeface="Cambria"/>
                 <a:cs typeface="Cambria"/>
               </a:rPr>
-              <a:t xml:space="preserve">)</a:t>
+              <a:t xml:space="preserve"> − 2) = 3(</a:t>
+            </a:r>
+            <a:r>
+              <a:rPr lang="en-US" sz="1425" dirty="0" i="1">
+                <a:solidFill>
+                  <a:srgbClr val="16171D"/>
+                </a:solidFill>
+                <a:latin typeface="Cambria"/>
+                <a:cs typeface="Cambria"/>
+              </a:rPr>
+              <a:t xml:space="preserve">x</a:t>
             </a:r>
             <a:r>
               <a:rPr lang="en-US" sz="1425" dirty="0">
                 <a:solidFill>
                   <a:srgbClr val="16171D"/>
                 </a:solidFill>
-                <a:latin typeface="Segoe UI"/>
-                <a:cs typeface="Segoe UI"/>
-              </a:rPr>
-              <a:t xml:space="preserve">: put </a:t>
-            </a:r>
-            <a:r>
-              <a:rPr lang="en-US" sz="1425" dirty="0">
-                <a:solidFill>
-                  <a:srgbClr val="16171D"/>
-                </a:solidFill>
-                <a:latin typeface="Cambria"/>
-                <a:cs typeface="Cambria"/>
-              </a:rPr>
-              <a:t xml:space="preserve">2</a:t>
-            </a:r>
-            <a:r>
-              <a:rPr lang="en-US" sz="1425" dirty="0" i="1">
-                <a:solidFill>
-                  <a:srgbClr val="16171D"/>
-                </a:solidFill>
-                <a:latin typeface="Cambria"/>
-                <a:cs typeface="Cambria"/>
-              </a:rPr>
-              <a:t xml:space="preserve">x</a:t>
-            </a:r>
-            <a:r>
-              <a:rPr lang="en-US" sz="1425" dirty="0">
-                <a:solidFill>
-                  <a:srgbClr val="16171D"/>
-                </a:solidFill>
-                <a:latin typeface="Segoe UI"/>
-                <a:cs typeface="Segoe UI"/>
-              </a:rPr>
-              <a:t xml:space="preserve"> in for </a:t>
-            </a:r>
-            <a:r>
-              <a:rPr lang="en-US" sz="1425" dirty="0" i="1">
-                <a:solidFill>
-                  <a:srgbClr val="16171D"/>
-                </a:solidFill>
-                <a:latin typeface="Cambria"/>
-                <a:cs typeface="Cambria"/>
-              </a:rPr>
-              <a:t xml:space="preserve">x</a:t>
-            </a:r>
-            <a:r>
-              <a:rPr lang="en-US" sz="1425" dirty="0">
-                <a:solidFill>
-                  <a:srgbClr val="16171D"/>
-                </a:solidFill>
-                <a:latin typeface="Segoe UI"/>
-                <a:cs typeface="Segoe UI"/>
-              </a:rPr>
-              <a:t xml:space="preserve">, so </a:t>
-            </a:r>
-            <a:r>
-              <a:rPr lang="en-US" sz="1425" dirty="0">
-                <a:solidFill>
-                  <a:srgbClr val="16171D"/>
-                </a:solidFill>
-                <a:latin typeface="Cambria"/>
-                <a:cs typeface="Cambria"/>
-              </a:rPr>
-              <a:t xml:space="preserve">2</a:t>
-            </a:r>
-            <a:r>
-              <a:rPr lang="en-US" sz="1425" dirty="0" i="1">
-                <a:solidFill>
-                  <a:srgbClr val="16171D"/>
-                </a:solidFill>
-                <a:latin typeface="Cambria"/>
-                <a:cs typeface="Cambria"/>
-              </a:rPr>
-              <a:t xml:space="preserve">x</a:t>
+                <a:latin typeface="Cambria"/>
+                <a:cs typeface="Cambria"/>
+              </a:rPr>
+              <a:t xml:space="preserve"> − 2)</a:t>
             </a:r>
             <a:r>
               <a:rPr lang="en-US" sz="1425" dirty="0">
@@ -18225,7 +18105,7 @@
                 <a:latin typeface="Segoe UI"/>
                 <a:cs typeface="Segoe UI"/>
               </a:rPr>
-              <a:t xml:space="preserve"> </a:t>
+              <a:t xml:space="preserve"> Distribute: </a:t>
             </a:r>
             <a:r>
               <a:rPr lang="en-US" sz="1425" dirty="0">
@@ -18235,7 +18115,7 @@
                 <a:latin typeface="Cambria"/>
                 <a:cs typeface="Cambria"/>
               </a:rPr>
-              <a:t xml:space="preserve">2</a:t>
+              <a:t xml:space="preserve">3 · </a:t>
             </a:r>
             <a:r>
               <a:rPr lang="en-US" sz="1425" dirty="0" i="1">
@@ -18245,7 +18125,7 @@
                 <a:latin typeface="Cambria"/>
                 <a:cs typeface="Cambria"/>
               </a:rPr>
-              <a:t xml:space="preserve">f</a:t>
+              <a:t xml:space="preserve">x</a:t>
             </a:r>
             <a:r>
               <a:rPr lang="en-US" sz="1425" dirty="0">
@@ -18255,7 +18135,7 @@
                 <a:latin typeface="Cambria"/>
                 <a:cs typeface="Cambria"/>
               </a:rPr>
-              <a:t xml:space="preserve">(</a:t>
+              <a:t xml:space="preserve"> − 3 · 2 = 3</a:t>
             </a:r>
             <a:r>
               <a:rPr lang="en-US" sz="1425" dirty="0" i="1">
@@ -18275,57 +18155,7 @@
                 <a:latin typeface="Cambria"/>
                 <a:cs typeface="Cambria"/>
               </a:rPr>
-              <a:t xml:space="preserve">)</a:t>
-            </a:r>
-            <a:r>
-              <a:rPr lang="en-US" sz="1425" dirty="0">
-                <a:solidFill>
-                  <a:srgbClr val="16171D"/>
-                </a:solidFill>
-                <a:latin typeface="Segoe UI"/>
-                <a:cs typeface="Segoe UI"/>
-              </a:rPr>
-              <a:t xml:space="preserve">: multiply </a:t>
-            </a:r>
-            <a:r>
-              <a:rPr lang="en-US" sz="1425" dirty="0" i="1">
-                <a:solidFill>
-                  <a:srgbClr val="16171D"/>
-                </a:solidFill>
-                <a:latin typeface="Cambria"/>
-                <a:cs typeface="Cambria"/>
-              </a:rPr>
-              <a:t xml:space="preserve">x</a:t>
-            </a:r>
-            <a:r>
-              <a:rPr lang="en-US" sz="1425" dirty="0">
-                <a:solidFill>
-                  <a:srgbClr val="16171D"/>
-                </a:solidFill>
-                <a:latin typeface="Segoe UI"/>
-                <a:cs typeface="Segoe UI"/>
-              </a:rPr>
-              <a:t xml:space="preserve"> by 2, so </a:t>
-            </a:r>
-            <a:r>
-              <a:rPr lang="en-US" sz="1425" dirty="0">
-                <a:solidFill>
-                  <a:srgbClr val="16171D"/>
-                </a:solidFill>
-                <a:latin typeface="Cambria"/>
-                <a:cs typeface="Cambria"/>
-              </a:rPr>
-              <a:t xml:space="preserve">2</a:t>
-            </a:r>
-            <a:r>
-              <a:rPr lang="en-US" sz="1425" dirty="0" i="1">
-                <a:solidFill>
-                  <a:srgbClr val="16171D"/>
-                </a:solidFill>
-                <a:latin typeface="Cambria"/>
-                <a:cs typeface="Cambria"/>
-              </a:rPr>
-              <a:t xml:space="preserve">x</a:t>
+              <a:t xml:space="preserve"> − 6</a:t>
             </a:r>
             <a:r>
               <a:rPr lang="en-US" sz="1425" dirty="0">
@@ -18364,7 +18194,7 @@
                 <a:latin typeface="Segoe UI"/>
                 <a:cs typeface="Segoe UI"/>
               </a:rPr>
-              <a:t xml:space="preserve"> Both are </a:t>
+              <a:t xml:space="preserve"> </a:t>
             </a:r>
             <a:r>
               <a:rPr lang="en-US" sz="1425" dirty="0" i="1">
@@ -18374,7 +18204,7 @@
                 <a:latin typeface="Cambria"/>
                 <a:cs typeface="Cambria"/>
               </a:rPr>
-              <a:t xml:space="preserve">y</a:t>
+              <a:t xml:space="preserve">g</a:t>
             </a:r>
             <a:r>
               <a:rPr lang="en-US" sz="1425" dirty="0">
@@ -18384,7 +18214,7 @@
                 <a:latin typeface="Cambria"/>
                 <a:cs typeface="Cambria"/>
               </a:rPr>
-              <a:t xml:space="preserve"> = 2</a:t>
+              <a:t xml:space="preserve">(</a:t>
             </a:r>
             <a:r>
               <a:rPr lang="en-US" sz="1425" dirty="0" i="1">
@@ -18401,10 +18231,40 @@
                 <a:solidFill>
                   <a:srgbClr val="16171D"/>
                 </a:solidFill>
-                <a:latin typeface="Segoe UI"/>
-                <a:cs typeface="Segoe UI"/>
-              </a:rPr>
-              <a:t xml:space="preserve">: yes, the same graph.</a:t>
+                <a:latin typeface="Cambria"/>
+                <a:cs typeface="Cambria"/>
+              </a:rPr>
+              <a:t xml:space="preserve">) = 3</a:t>
+            </a:r>
+            <a:r>
+              <a:rPr lang="en-US" sz="1425" dirty="0" i="1">
+                <a:solidFill>
+                  <a:srgbClr val="16171D"/>
+                </a:solidFill>
+                <a:latin typeface="Cambria"/>
+                <a:cs typeface="Cambria"/>
+              </a:rPr>
+              <a:t xml:space="preserve">x</a:t>
+            </a:r>
+            <a:r>
+              <a:rPr lang="en-US" sz="1425" dirty="0">
+                <a:solidFill>
+                  <a:srgbClr val="16171D"/>
+                </a:solidFill>
+                <a:latin typeface="Cambria"/>
+                <a:cs typeface="Cambria"/>
+              </a:rPr>
+              <a:t xml:space="preserve"> − 6</a:t>
+            </a:r>
+            <a:r>
+              <a:rPr lang="en-US" sz="1425" dirty="0">
+                <a:solidFill>
+                  <a:srgbClr val="16171D"/>
+                </a:solidFill>
+                <a:latin typeface="Segoe UI"/>
+                <a:cs typeface="Segoe UI"/>
+              </a:rPr>
+              <a:t xml:space="preserve">.</a:t>
             </a:r>
             <a:endParaRPr lang="en-US" sz="1425" dirty="0"/>
           </a:p>
@@ -30838,7 +30698,7 @@
         <p:spPr>
           <a:xfrm>
             <a:off x="6210148" y="4011168"/>
-            <a:ext cx="5295748" cy="2042160"/>
+            <a:ext cx="5295748" cy="2499360"/>
           </a:xfrm>
           <a:prstGeom prst="roundRect">
             <a:avLst>
@@ -30878,7 +30738,7 @@
         <p:spPr>
           <a:xfrm>
             <a:off x="6419698" y="4182618"/>
-            <a:ext cx="4876648" cy="294894"/>
+            <a:ext cx="4876648" cy="534924"/>
           </a:xfrm>
           <a:prstGeom prst="rect">
             <a:avLst/>
@@ -30917,7 +30777,7 @@
                 <a:latin typeface="Segoe UI"/>
                 <a:cs typeface="Segoe UI"/>
               </a:rPr>
-              <a:t xml:space="preserve"> Is </a:t>
+              <a:t xml:space="preserve"> Let </a:t>
             </a:r>
             <a:r>
               <a:rPr lang="en-US" sz="1575" dirty="0" i="1">
@@ -30927,7 +30787,7 @@
                 <a:latin typeface="Cambria"/>
                 <a:cs typeface="Cambria"/>
               </a:rPr>
-              <a:t xml:space="preserve">h</a:t>
+              <a:t xml:space="preserve">f</a:t>
             </a:r>
             <a:r>
               <a:rPr lang="en-US" sz="1575" dirty="0">
@@ -30957,7 +30817,7 @@
                 <a:latin typeface="Cambria"/>
                 <a:cs typeface="Cambria"/>
               </a:rPr>
-              <a:t xml:space="preserve">) = −⅔</a:t>
+              <a:t xml:space="preserve">) = </a:t>
             </a:r>
             <a:r>
               <a:rPr lang="en-US" sz="1575" dirty="0" i="1">
@@ -30974,20 +30834,150 @@
                 <a:solidFill>
                   <a:srgbClr val="16171D"/>
                 </a:solidFill>
-                <a:latin typeface="Cambria"/>
-                <a:cs typeface="Cambria"/>
-              </a:rPr>
-              <a:t xml:space="preserve"> + 5</a:t>
+                <a:latin typeface="Segoe UI"/>
+                <a:cs typeface="Segoe UI"/>
+              </a:rPr>
+              <a:t xml:space="preserve"> and </a:t>
+            </a:r>
+            <a:r>
+              <a:rPr lang="en-US" sz="1575" dirty="0" i="1">
+                <a:solidFill>
+                  <a:srgbClr val="16171D"/>
+                </a:solidFill>
+                <a:latin typeface="Cambria"/>
+                <a:cs typeface="Cambria"/>
+              </a:rPr>
+              <a:t xml:space="preserve">g</a:t>
             </a:r>
             <a:r>
               <a:rPr lang="en-US" sz="1575" dirty="0">
                 <a:solidFill>
                   <a:srgbClr val="16171D"/>
                 </a:solidFill>
-                <a:latin typeface="Segoe UI"/>
-                <a:cs typeface="Segoe UI"/>
-              </a:rPr>
-              <a:t xml:space="preserve"> increasing or decreasing?</a:t>
+                <a:latin typeface="Cambria"/>
+                <a:cs typeface="Cambria"/>
+              </a:rPr>
+              <a:t xml:space="preserve">(</a:t>
+            </a:r>
+            <a:r>
+              <a:rPr lang="en-US" sz="1575" dirty="0" i="1">
+                <a:solidFill>
+                  <a:srgbClr val="16171D"/>
+                </a:solidFill>
+                <a:latin typeface="Cambria"/>
+                <a:cs typeface="Cambria"/>
+              </a:rPr>
+              <a:t xml:space="preserve">x</a:t>
+            </a:r>
+            <a:r>
+              <a:rPr lang="en-US" sz="1575" dirty="0">
+                <a:solidFill>
+                  <a:srgbClr val="16171D"/>
+                </a:solidFill>
+                <a:latin typeface="Cambria"/>
+                <a:cs typeface="Cambria"/>
+              </a:rPr>
+              <a:t xml:space="preserve">) = 2</a:t>
+            </a:r>
+            <a:r>
+              <a:rPr lang="en-US" sz="1575" dirty="0" i="1">
+                <a:solidFill>
+                  <a:srgbClr val="16171D"/>
+                </a:solidFill>
+                <a:latin typeface="Cambria"/>
+                <a:cs typeface="Cambria"/>
+              </a:rPr>
+              <a:t xml:space="preserve">f</a:t>
+            </a:r>
+            <a:r>
+              <a:rPr lang="en-US" sz="1575" dirty="0">
+                <a:solidFill>
+                  <a:srgbClr val="16171D"/>
+                </a:solidFill>
+                <a:latin typeface="Cambria"/>
+                <a:cs typeface="Cambria"/>
+              </a:rPr>
+              <a:t xml:space="preserve">(</a:t>
+            </a:r>
+            <a:r>
+              <a:rPr lang="en-US" sz="1575" dirty="0" i="1">
+                <a:solidFill>
+                  <a:srgbClr val="16171D"/>
+                </a:solidFill>
+                <a:latin typeface="Cambria"/>
+                <a:cs typeface="Cambria"/>
+              </a:rPr>
+              <a:t xml:space="preserve">x</a:t>
+            </a:r>
+            <a:r>
+              <a:rPr lang="en-US" sz="1575" dirty="0">
+                <a:solidFill>
+                  <a:srgbClr val="16171D"/>
+                </a:solidFill>
+                <a:latin typeface="Cambria"/>
+                <a:cs typeface="Cambria"/>
+              </a:rPr>
+              <a:t xml:space="preserve">) − 3</a:t>
+            </a:r>
+            <a:r>
+              <a:rPr lang="en-US" sz="1575" dirty="0">
+                <a:solidFill>
+                  <a:srgbClr val="16171D"/>
+                </a:solidFill>
+                <a:latin typeface="Segoe UI"/>
+                <a:cs typeface="Segoe UI"/>
+              </a:rPr>
+              <a:t xml:space="preserve">. Which is </a:t>
+            </a:r>
+            <a:r>
+              <a:rPr lang="en-US" sz="1575" dirty="0" i="1">
+                <a:solidFill>
+                  <a:srgbClr val="16171D"/>
+                </a:solidFill>
+                <a:latin typeface="Cambria"/>
+                <a:cs typeface="Cambria"/>
+              </a:rPr>
+              <a:t xml:space="preserve">g</a:t>
+            </a:r>
+            <a:r>
+              <a:rPr lang="en-US" sz="1575" dirty="0">
+                <a:solidFill>
+                  <a:srgbClr val="16171D"/>
+                </a:solidFill>
+                <a:latin typeface="Cambria"/>
+                <a:cs typeface="Cambria"/>
+              </a:rPr>
+              <a:t xml:space="preserve">(</a:t>
+            </a:r>
+            <a:r>
+              <a:rPr lang="en-US" sz="1575" dirty="0" i="1">
+                <a:solidFill>
+                  <a:srgbClr val="16171D"/>
+                </a:solidFill>
+                <a:latin typeface="Cambria"/>
+                <a:cs typeface="Cambria"/>
+              </a:rPr>
+              <a:t xml:space="preserve">x</a:t>
+            </a:r>
+            <a:r>
+              <a:rPr lang="en-US" sz="1575" dirty="0">
+                <a:solidFill>
+                  <a:srgbClr val="16171D"/>
+                </a:solidFill>
+                <a:latin typeface="Cambria"/>
+                <a:cs typeface="Cambria"/>
+              </a:rPr>
+              <a:t xml:space="preserve">)</a:t>
+            </a:r>
+            <a:r>
+              <a:rPr lang="en-US" sz="1575" dirty="0">
+                <a:solidFill>
+                  <a:srgbClr val="16171D"/>
+                </a:solidFill>
+                <a:latin typeface="Segoe UI"/>
+                <a:cs typeface="Segoe UI"/>
+              </a:rPr>
+              <a:t xml:space="preserve"> in slope-intercept form?</a:t>
             </a:r>
             <a:endParaRPr lang="en-US" sz="1575" dirty="0"/>
           </a:p>
@@ -31001,7 +30991,7 @@
         </p:nvSpPr>
         <p:spPr>
           <a:xfrm>
-            <a:off x="6419698" y="4515612"/>
+            <a:off x="6419698" y="4755642"/>
             <a:ext cx="4876648" cy="294894"/>
           </a:xfrm>
           <a:prstGeom prst="rect">
@@ -31041,7 +31031,67 @@
                 <a:latin typeface="Segoe UI"/>
                 <a:cs typeface="Segoe UI"/>
               </a:rPr>
-              <a:t xml:space="preserve"> slope + rises, slope − falls</a:t>
+              <a:t xml:space="preserve"> replace </a:t>
+            </a:r>
+            <a:r>
+              <a:rPr lang="en-US" sz="1575" dirty="0" i="1">
+                <a:solidFill>
+                  <a:srgbClr val="16171D"/>
+                </a:solidFill>
+                <a:latin typeface="Cambria"/>
+                <a:cs typeface="Cambria"/>
+              </a:rPr>
+              <a:t xml:space="preserve">f</a:t>
+            </a:r>
+            <a:r>
+              <a:rPr lang="en-US" sz="1575" dirty="0">
+                <a:solidFill>
+                  <a:srgbClr val="16171D"/>
+                </a:solidFill>
+                <a:latin typeface="Cambria"/>
+                <a:cs typeface="Cambria"/>
+              </a:rPr>
+              <a:t xml:space="preserve">(</a:t>
+            </a:r>
+            <a:r>
+              <a:rPr lang="en-US" sz="1575" dirty="0" i="1">
+                <a:solidFill>
+                  <a:srgbClr val="16171D"/>
+                </a:solidFill>
+                <a:latin typeface="Cambria"/>
+                <a:cs typeface="Cambria"/>
+              </a:rPr>
+              <a:t xml:space="preserve">x</a:t>
+            </a:r>
+            <a:r>
+              <a:rPr lang="en-US" sz="1575" dirty="0">
+                <a:solidFill>
+                  <a:srgbClr val="16171D"/>
+                </a:solidFill>
+                <a:latin typeface="Cambria"/>
+                <a:cs typeface="Cambria"/>
+              </a:rPr>
+              <a:t xml:space="preserve">)</a:t>
+            </a:r>
+            <a:r>
+              <a:rPr lang="en-US" sz="1575" dirty="0">
+                <a:solidFill>
+                  <a:srgbClr val="16171D"/>
+                </a:solidFill>
+                <a:latin typeface="Segoe UI"/>
+                <a:cs typeface="Segoe UI"/>
+              </a:rPr>
+              <a:t xml:space="preserve"> with </a:t>
+            </a:r>
+            <a:r>
+              <a:rPr lang="en-US" sz="1575" dirty="0" i="1">
+                <a:solidFill>
+                  <a:srgbClr val="16171D"/>
+                </a:solidFill>
+                <a:latin typeface="Cambria"/>
+                <a:cs typeface="Cambria"/>
+              </a:rPr>
+              <a:t xml:space="preserve">x</a:t>
             </a:r>
             <a:endParaRPr lang="en-US" sz="1575" dirty="0"/>
           </a:p>
@@ -31055,8 +31105,8 @@
         </p:nvSpPr>
         <p:spPr>
           <a:xfrm>
-            <a:off x="6419698" y="4848606"/>
-            <a:ext cx="4876648" cy="1033272"/>
+            <a:off x="6419698" y="5088636"/>
+            <a:ext cx="4876648" cy="1250442"/>
           </a:xfrm>
           <a:prstGeom prst="roundRect">
             <a:avLst>
@@ -31092,14 +31142,64 @@
               <a:t xml:space="preserve">ANSWER   </a:t>
             </a:r>
             <a:r>
+              <a:rPr lang="en-US" sz="1425" dirty="0" b="1" i="1">
+                <a:solidFill>
+                  <a:srgbClr val="16171D"/>
+                </a:solidFill>
+                <a:latin typeface="Cambria"/>
+                <a:cs typeface="Cambria"/>
+              </a:rPr>
+              <a:t xml:space="preserve">g</a:t>
+            </a:r>
+            <a:r>
               <a:rPr lang="en-US" sz="1425" dirty="0" b="1">
                 <a:solidFill>
                   <a:srgbClr val="16171D"/>
                 </a:solidFill>
-                <a:latin typeface="Segoe UI"/>
-                <a:cs typeface="Segoe UI"/>
-              </a:rPr>
-              <a:t xml:space="preserve">Decreasing</a:t>
+                <a:latin typeface="Cambria"/>
+                <a:cs typeface="Cambria"/>
+              </a:rPr>
+              <a:t xml:space="preserve">(</a:t>
+            </a:r>
+            <a:r>
+              <a:rPr lang="en-US" sz="1425" dirty="0" b="1" i="1">
+                <a:solidFill>
+                  <a:srgbClr val="16171D"/>
+                </a:solidFill>
+                <a:latin typeface="Cambria"/>
+                <a:cs typeface="Cambria"/>
+              </a:rPr>
+              <a:t xml:space="preserve">x</a:t>
+            </a:r>
+            <a:r>
+              <a:rPr lang="en-US" sz="1425" dirty="0" b="1">
+                <a:solidFill>
+                  <a:srgbClr val="16171D"/>
+                </a:solidFill>
+                <a:latin typeface="Cambria"/>
+                <a:cs typeface="Cambria"/>
+              </a:rPr>
+              <a:t xml:space="preserve">) = 2</a:t>
+            </a:r>
+            <a:r>
+              <a:rPr lang="en-US" sz="1425" dirty="0" b="1" i="1">
+                <a:solidFill>
+                  <a:srgbClr val="16171D"/>
+                </a:solidFill>
+                <a:latin typeface="Cambria"/>
+                <a:cs typeface="Cambria"/>
+              </a:rPr>
+              <a:t xml:space="preserve">x</a:t>
+            </a:r>
+            <a:r>
+              <a:rPr lang="en-US" sz="1425" dirty="0" b="1">
+                <a:solidFill>
+                  <a:srgbClr val="16171D"/>
+                </a:solidFill>
+                <a:latin typeface="Cambria"/>
+                <a:cs typeface="Cambria"/>
+              </a:rPr>
+              <a:t xml:space="preserve"> − 3</a:t>
             </a:r>
             <a:br>
               <a:rPr lang="en-US" sz="1425" dirty="0">
@@ -31128,7 +31228,17 @@
                 <a:latin typeface="Segoe UI"/>
                 <a:cs typeface="Segoe UI"/>
               </a:rPr>
-              <a:t xml:space="preserve"> The slope is </a:t>
+              <a:t xml:space="preserve"> </a:t>
+            </a:r>
+            <a:r>
+              <a:rPr lang="en-US" sz="1425" dirty="0" i="1">
+                <a:solidFill>
+                  <a:srgbClr val="16171D"/>
+                </a:solidFill>
+                <a:latin typeface="Cambria"/>
+                <a:cs typeface="Cambria"/>
+              </a:rPr>
+              <a:t xml:space="preserve">g</a:t>
             </a:r>
             <a:r>
               <a:rPr lang="en-US" sz="1425" dirty="0">
@@ -31138,17 +31248,27 @@
                 <a:latin typeface="Cambria"/>
                 <a:cs typeface="Cambria"/>
               </a:rPr>
-              <a:t xml:space="preserve">−⅔</a:t>
+              <a:t xml:space="preserve">(</a:t>
+            </a:r>
+            <a:r>
+              <a:rPr lang="en-US" sz="1425" dirty="0" i="1">
+                <a:solidFill>
+                  <a:srgbClr val="16171D"/>
+                </a:solidFill>
+                <a:latin typeface="Cambria"/>
+                <a:cs typeface="Cambria"/>
+              </a:rPr>
+              <a:t xml:space="preserve">x</a:t>
             </a:r>
             <a:r>
               <a:rPr lang="en-US" sz="1425" dirty="0">
                 <a:solidFill>
                   <a:srgbClr val="16171D"/>
                 </a:solidFill>
-                <a:latin typeface="Segoe UI"/>
-                <a:cs typeface="Segoe UI"/>
-              </a:rPr>
-              <a:t xml:space="preserve">, the number with </a:t>
+                <a:latin typeface="Cambria"/>
+                <a:cs typeface="Cambria"/>
+              </a:rPr>
+              <a:t xml:space="preserve">) = 2</a:t>
             </a:r>
             <a:r>
               <a:rPr lang="en-US" sz="1425" dirty="0" i="1">
@@ -31158,7 +31278,37 @@
                 <a:latin typeface="Cambria"/>
                 <a:cs typeface="Cambria"/>
               </a:rPr>
+              <a:t xml:space="preserve">f</a:t>
+            </a:r>
+            <a:r>
+              <a:rPr lang="en-US" sz="1425" dirty="0">
+                <a:solidFill>
+                  <a:srgbClr val="16171D"/>
+                </a:solidFill>
+                <a:latin typeface="Cambria"/>
+                <a:cs typeface="Cambria"/>
+              </a:rPr>
+              <a:t xml:space="preserve">(</a:t>
+            </a:r>
+            <a:r>
+              <a:rPr lang="en-US" sz="1425" dirty="0" i="1">
+                <a:solidFill>
+                  <a:srgbClr val="16171D"/>
+                </a:solidFill>
+                <a:latin typeface="Cambria"/>
+                <a:cs typeface="Cambria"/>
+              </a:rPr>
               <a:t xml:space="preserve">x</a:t>
+            </a:r>
+            <a:r>
+              <a:rPr lang="en-US" sz="1425" dirty="0">
+                <a:solidFill>
+                  <a:srgbClr val="16171D"/>
+                </a:solidFill>
+                <a:latin typeface="Cambria"/>
+                <a:cs typeface="Cambria"/>
+              </a:rPr>
+              <a:t xml:space="preserve">) − 3</a:t>
             </a:r>
             <a:r>
               <a:rPr lang="en-US" sz="1425" dirty="0">
@@ -31197,7 +31347,216 @@
                 <a:latin typeface="Segoe UI"/>
                 <a:cs typeface="Segoe UI"/>
               </a:rPr>
-              <a:t xml:space="preserve"> It is negative, so the line falls from left to right: decreasing.</a:t>
+              <a:t xml:space="preserve"> Put in </a:t>
+            </a:r>
+            <a:r>
+              <a:rPr lang="en-US" sz="1425" dirty="0" i="1">
+                <a:solidFill>
+                  <a:srgbClr val="16171D"/>
+                </a:solidFill>
+                <a:latin typeface="Cambria"/>
+                <a:cs typeface="Cambria"/>
+              </a:rPr>
+              <a:t xml:space="preserve">x</a:t>
+            </a:r>
+            <a:r>
+              <a:rPr lang="en-US" sz="1425" dirty="0">
+                <a:solidFill>
+                  <a:srgbClr val="16171D"/>
+                </a:solidFill>
+                <a:latin typeface="Segoe UI"/>
+                <a:cs typeface="Segoe UI"/>
+              </a:rPr>
+              <a:t xml:space="preserve"> for </a:t>
+            </a:r>
+            <a:r>
+              <a:rPr lang="en-US" sz="1425" dirty="0" i="1">
+                <a:solidFill>
+                  <a:srgbClr val="16171D"/>
+                </a:solidFill>
+                <a:latin typeface="Cambria"/>
+                <a:cs typeface="Cambria"/>
+              </a:rPr>
+              <a:t xml:space="preserve">f</a:t>
+            </a:r>
+            <a:r>
+              <a:rPr lang="en-US" sz="1425" dirty="0">
+                <a:solidFill>
+                  <a:srgbClr val="16171D"/>
+                </a:solidFill>
+                <a:latin typeface="Cambria"/>
+                <a:cs typeface="Cambria"/>
+              </a:rPr>
+              <a:t xml:space="preserve">(</a:t>
+            </a:r>
+            <a:r>
+              <a:rPr lang="en-US" sz="1425" dirty="0" i="1">
+                <a:solidFill>
+                  <a:srgbClr val="16171D"/>
+                </a:solidFill>
+                <a:latin typeface="Cambria"/>
+                <a:cs typeface="Cambria"/>
+              </a:rPr>
+              <a:t xml:space="preserve">x</a:t>
+            </a:r>
+            <a:r>
+              <a:rPr lang="en-US" sz="1425" dirty="0">
+                <a:solidFill>
+                  <a:srgbClr val="16171D"/>
+                </a:solidFill>
+                <a:latin typeface="Cambria"/>
+                <a:cs typeface="Cambria"/>
+              </a:rPr>
+              <a:t xml:space="preserve">)</a:t>
+            </a:r>
+            <a:r>
+              <a:rPr lang="en-US" sz="1425" dirty="0">
+                <a:solidFill>
+                  <a:srgbClr val="16171D"/>
+                </a:solidFill>
+                <a:latin typeface="Segoe UI"/>
+                <a:cs typeface="Segoe UI"/>
+              </a:rPr>
+              <a:t xml:space="preserve">: </a:t>
+            </a:r>
+            <a:r>
+              <a:rPr lang="en-US" sz="1425" dirty="0" i="1">
+                <a:solidFill>
+                  <a:srgbClr val="16171D"/>
+                </a:solidFill>
+                <a:latin typeface="Cambria"/>
+                <a:cs typeface="Cambria"/>
+              </a:rPr>
+              <a:t xml:space="preserve">g</a:t>
+            </a:r>
+            <a:r>
+              <a:rPr lang="en-US" sz="1425" dirty="0">
+                <a:solidFill>
+                  <a:srgbClr val="16171D"/>
+                </a:solidFill>
+                <a:latin typeface="Cambria"/>
+                <a:cs typeface="Cambria"/>
+              </a:rPr>
+              <a:t xml:space="preserve">(</a:t>
+            </a:r>
+            <a:r>
+              <a:rPr lang="en-US" sz="1425" dirty="0" i="1">
+                <a:solidFill>
+                  <a:srgbClr val="16171D"/>
+                </a:solidFill>
+                <a:latin typeface="Cambria"/>
+                <a:cs typeface="Cambria"/>
+              </a:rPr>
+              <a:t xml:space="preserve">x</a:t>
+            </a:r>
+            <a:r>
+              <a:rPr lang="en-US" sz="1425" dirty="0">
+                <a:solidFill>
+                  <a:srgbClr val="16171D"/>
+                </a:solidFill>
+                <a:latin typeface="Cambria"/>
+                <a:cs typeface="Cambria"/>
+              </a:rPr>
+              <a:t xml:space="preserve">) = 2</a:t>
+            </a:r>
+            <a:r>
+              <a:rPr lang="en-US" sz="1425" dirty="0" i="1">
+                <a:solidFill>
+                  <a:srgbClr val="16171D"/>
+                </a:solidFill>
+                <a:latin typeface="Cambria"/>
+                <a:cs typeface="Cambria"/>
+              </a:rPr>
+              <a:t xml:space="preserve">x</a:t>
+            </a:r>
+            <a:r>
+              <a:rPr lang="en-US" sz="1425" dirty="0">
+                <a:solidFill>
+                  <a:srgbClr val="16171D"/>
+                </a:solidFill>
+                <a:latin typeface="Cambria"/>
+                <a:cs typeface="Cambria"/>
+              </a:rPr>
+              <a:t xml:space="preserve"> − 3</a:t>
+            </a:r>
+            <a:r>
+              <a:rPr lang="en-US" sz="1425" dirty="0">
+                <a:solidFill>
+                  <a:srgbClr val="16171D"/>
+                </a:solidFill>
+                <a:latin typeface="Segoe UI"/>
+                <a:cs typeface="Segoe UI"/>
+              </a:rPr>
+              <a:t xml:space="preserve">.</a:t>
+            </a:r>
+            <a:br>
+              <a:rPr lang="en-US" sz="1425" dirty="0">
+                <a:solidFill>
+                  <a:srgbClr val="16171D"/>
+                </a:solidFill>
+                <a:latin typeface="Segoe UI"/>
+                <a:cs typeface="Segoe UI"/>
+              </a:rPr>
+            </a:br>
+            <a:r>
+              <a:rPr lang="en-US" sz="1425" dirty="0" b="1">
+                <a:solidFill>
+                  <a:srgbClr val="16171D"/>
+                </a:solidFill>
+                <a:latin typeface="Segoe UI"/>
+                <a:cs typeface="Segoe UI"/>
+              </a:rPr>
+              <a:t xml:space="preserve">3.</a:t>
+            </a:r>
+            <a:r>
+              <a:rPr lang="en-US" sz="1425" dirty="0">
+                <a:solidFill>
+                  <a:srgbClr val="16171D"/>
+                </a:solidFill>
+                <a:latin typeface="Segoe UI"/>
+                <a:cs typeface="Segoe UI"/>
+              </a:rPr>
+              <a:t xml:space="preserve"> Slope 2 (dilation by 2), </a:t>
+            </a:r>
+            <a:r>
+              <a:rPr lang="en-US" sz="1425" dirty="0" i="1">
+                <a:solidFill>
+                  <a:srgbClr val="16171D"/>
+                </a:solidFill>
+                <a:latin typeface="Cambria"/>
+                <a:cs typeface="Cambria"/>
+              </a:rPr>
+              <a:t xml:space="preserve">y</a:t>
+            </a:r>
+            <a:r>
+              <a:rPr lang="en-US" sz="1425" dirty="0">
+                <a:solidFill>
+                  <a:srgbClr val="16171D"/>
+                </a:solidFill>
+                <a:latin typeface="Segoe UI"/>
+                <a:cs typeface="Segoe UI"/>
+              </a:rPr>
+              <a:t xml:space="preserve">-intercept </a:t>
+            </a:r>
+            <a:r>
+              <a:rPr lang="en-US" sz="1425" dirty="0">
+                <a:solidFill>
+                  <a:srgbClr val="16171D"/>
+                </a:solidFill>
+                <a:latin typeface="Cambria"/>
+                <a:cs typeface="Cambria"/>
+              </a:rPr>
+              <a:t xml:space="preserve">−3</a:t>
+            </a:r>
+            <a:r>
+              <a:rPr lang="en-US" sz="1425" dirty="0">
+                <a:solidFill>
+                  <a:srgbClr val="16171D"/>
+                </a:solidFill>
+                <a:latin typeface="Segoe UI"/>
+                <a:cs typeface="Segoe UI"/>
+              </a:rPr>
+              <a:t xml:space="preserve"> (down 3).</a:t>
             </a:r>
             <a:endParaRPr lang="en-US" sz="1425" dirty="0"/>
           </a:p>

--- a/IEP/t2-lesson2-vertical-horizontal-transformations-IEP-catchup.pptx
+++ b/IEP/t2-lesson2-vertical-horizontal-transformations-IEP-catchup.pptx
@@ -2908,7 +2908,7 @@
                 <a:latin typeface="Segoe UI"/>
                 <a:cs typeface="Segoe UI"/>
               </a:rPr>
-              <a:t xml:space="preserve">I do · Watch me</a:t>
+              <a:t xml:space="preserve">I do · Watch me · ★ Essential</a:t>
             </a:r>
             <a:endParaRPr lang="en-US" sz="1200" dirty="0"/>
           </a:p>
@@ -7859,7 +7859,7 @@
                 <a:latin typeface="Segoe UI"/>
                 <a:cs typeface="Segoe UI"/>
               </a:rPr>
-              <a:t xml:space="preserve">You do · Try it</a:t>
+              <a:t xml:space="preserve">You do · Try it · ★ Essential</a:t>
             </a:r>
             <a:endParaRPr lang="en-US" sz="1200" dirty="0"/>
           </a:p>
@@ -8882,7 +8882,7 @@
                 <a:latin typeface="Segoe UI"/>
                 <a:cs typeface="Segoe UI"/>
               </a:rPr>
-              <a:t xml:space="preserve">Check it · Step by step</a:t>
+              <a:t xml:space="preserve">Check it · Step by step · ★ Essential</a:t>
             </a:r>
             <a:endParaRPr lang="en-US" sz="1200" dirty="0"/>
           </a:p>
@@ -11023,7 +11023,7 @@
                 <a:latin typeface="Segoe UI"/>
                 <a:cs typeface="Segoe UI"/>
               </a:rPr>
-              <a:t xml:space="preserve">We do · Simplify</a:t>
+              <a:t xml:space="preserve">We do · Simplify · ★ Essential</a:t>
             </a:r>
             <a:endParaRPr lang="en-US" sz="1200" dirty="0"/>
           </a:p>
@@ -11996,7 +11996,7 @@
                 <a:latin typeface="Segoe UI"/>
                 <a:cs typeface="Segoe UI"/>
               </a:rPr>
-              <a:t xml:space="preserve">You do · Try it</a:t>
+              <a:t xml:space="preserve">You do · Try it · ★ Essential</a:t>
             </a:r>
             <a:endParaRPr lang="en-US" sz="1200" dirty="0"/>
           </a:p>
@@ -13029,7 +13029,7 @@
                 <a:latin typeface="Segoe UI"/>
                 <a:cs typeface="Segoe UI"/>
               </a:rPr>
-              <a:t xml:space="preserve">Check it · Step by step</a:t>
+              <a:t xml:space="preserve">Check it · Step by step · ★ Essential</a:t>
             </a:r>
             <a:endParaRPr lang="en-US" sz="1200" dirty="0"/>
           </a:p>
@@ -23992,7 +23992,7 @@
                 <a:latin typeface="Segoe UI"/>
                 <a:cs typeface="Segoe UI"/>
               </a:rPr>
-              <a:t xml:space="preserve">I do · Stretch inside</a:t>
+              <a:t xml:space="preserve">I do · Stretch inside · ★ Essential</a:t>
             </a:r>
             <a:endParaRPr lang="en-US" sz="1200" dirty="0"/>
           </a:p>
@@ -28570,7 +28570,7 @@
                 <a:latin typeface="Segoe UI"/>
                 <a:cs typeface="Segoe UI"/>
               </a:rPr>
-              <a:t xml:space="preserve">Next class: Wednesday, October 28. Skills Practice day: Lesson 2 quiz and Topic 1 Lesson 5 quiz. Then Lesson 3 starts Thursday, October 29.</a:t>
+              <a:t xml:space="preserve">Next class: Wednesday, October 28. Lesson 3 starts: open the Lesson 3 deck. Tonight: the Lesson 2 quiz as homework.</a:t>
             </a:r>
             <a:endParaRPr lang="en-US" sz="2250" dirty="0"/>
           </a:p>

--- a/IEP/t2-lesson2-vertical-horizontal-transformations-IEP-catchup.pptx
+++ b/IEP/t2-lesson2-vertical-horizontal-transformations-IEP-catchup.pptx
@@ -651,7 +651,7 @@
           <a:p>
             <a:r>
               <a:rPr lang="en-US" dirty="0"/>
-              <a:t>Class starts here on Tuesday, October 27.</a:t>
+              <a:t>Class starts here on an extra Lesson 2 day.</a:t>
             </a:r>
           </a:p>
         </p:txBody>
@@ -1291,7 +1291,7 @@
           <a:p>
             <a:r>
               <a:rPr lang="en-US" dirty="0"/>
-              <a:t>Class ends here on Tuesday, October 27.</a:t>
+              <a:t>Class ends here on an extra Lesson 2 day.</a:t>
             </a:r>
           </a:p>
         </p:txBody>
@@ -2220,7 +2220,7 @@
                 <a:latin typeface="Segoe UI"/>
                 <a:cs typeface="Segoe UI"/>
               </a:rPr>
-              <a:t xml:space="preserve">Adds a 15-minute Topic 1 Catch-Up (Lessons 5–6) each day · Day 1: Mon, Oct 26 · Day 2: Tue, Oct 27</a:t>
+              <a:t xml:space="preserve">Adds a 15-minute Topic 1 Catch-Up (Lessons 5–6) each day · Day 1: Mon, Oct 26 · Day 2: extra day</a:t>
             </a:r>
             <a:endParaRPr lang="en-US" sz="1650" dirty="0"/>
           </a:p>
@@ -15058,7 +15058,7 @@
         <p:spPr>
           <a:xfrm>
             <a:off x="685800" y="5253228"/>
-            <a:ext cx="10820095" cy="740664"/>
+            <a:ext cx="10820095" cy="1083564"/>
           </a:xfrm>
           <a:prstGeom prst="rect">
             <a:avLst/>
@@ -15087,7 +15087,7 @@
                 <a:latin typeface="Segoe UI"/>
                 <a:cs typeface="Segoe UI"/>
               </a:rPr>
-              <a:t xml:space="preserve">Next class: Tuesday, October 27. Start at the next slide, “Start: Tuesday, October 27.”</a:t>
+              <a:t xml:space="preserve">Next class: Tuesday, October 27. Lesson 3 starts: open the Lesson 3 deck. (Monday is the Catch-Up Day deck; use the next slide only if you get an extra Lesson 2 day.)</a:t>
             </a:r>
             <a:endParaRPr lang="en-US" sz="2250" dirty="0"/>
           </a:p>
@@ -15237,7 +15237,7 @@
                 <a:latin typeface="Segoe UI"/>
                 <a:cs typeface="Segoe UI"/>
               </a:rPr>
-              <a:t xml:space="preserve">Start: Tuesday, October 27</a:t>
+              <a:t xml:space="preserve">Start: an extra Lesson 2 day</a:t>
             </a:r>
             <a:endParaRPr lang="en-US" sz="8250" dirty="0"/>
           </a:p>
@@ -15387,7 +15387,7 @@
                 <a:latin typeface="Segoe UI"/>
                 <a:cs typeface="Segoe UI"/>
               </a:rPr>
-              <a:t xml:space="preserve">Day 2 · Bell Work · Review · Tue, Oct 27</a:t>
+              <a:t xml:space="preserve">Day 2 · Bell Work · Review · extra day</a:t>
             </a:r>
             <a:endParaRPr lang="en-US" sz="1200" dirty="0"/>
           </a:p>
@@ -18796,7 +18796,7 @@
                 <a:latin typeface="Segoe UI"/>
                 <a:cs typeface="Segoe UI"/>
               </a:rPr>
-              <a:t xml:space="preserve">Topic 1 Catch-Up · Tue, Oct 27 · about 15 minutes</a:t>
+              <a:t xml:space="preserve">Topic 1 Catch-Up · extra day · about 15 minutes</a:t>
             </a:r>
             <a:endParaRPr lang="en-US" sz="1200" dirty="0"/>
           </a:p>
@@ -28526,7 +28526,7 @@
                 <a:latin typeface="Segoe UI"/>
                 <a:cs typeface="Segoe UI"/>
               </a:rPr>
-              <a:t xml:space="preserve">Stop here: Tuesday, October 27</a:t>
+              <a:t xml:space="preserve">Stop here: an extra Lesson 2 day</a:t>
             </a:r>
             <a:endParaRPr lang="en-US" sz="8250" dirty="0"/>
           </a:p>
@@ -28541,7 +28541,7 @@
         <p:spPr>
           <a:xfrm>
             <a:off x="685800" y="5253228"/>
-            <a:ext cx="10820095" cy="740664"/>
+            <a:ext cx="10820095" cy="397764"/>
           </a:xfrm>
           <a:prstGeom prst="rect">
             <a:avLst/>
@@ -28570,7 +28570,7 @@
                 <a:latin typeface="Segoe UI"/>
                 <a:cs typeface="Segoe UI"/>
               </a:rPr>
-              <a:t xml:space="preserve">Next class: Wednesday, October 28. Lesson 3 starts: open the Lesson 3 deck. Tonight: the Lesson 2 quiz as homework.</a:t>
+              <a:t xml:space="preserve">Next class: Lesson 3. Open the Lesson 3 deck.</a:t>
             </a:r>
             <a:endParaRPr lang="en-US" sz="2250" dirty="0"/>
           </a:p>
